--- a/public/lessons/year-6-maths/summer/week-21/continue-and-describe-sequences/teaching-powerpoint-v1.pptx
+++ b/public/lessons/year-6-maths/summer/week-21/continue-and-describe-sequences/teaching-powerpoint-v1.pptx
@@ -2,24 +2,24 @@
 <file path=ppt/presentation.xml><?xml version="1.0" encoding="utf-8"?>
 <p:presentation xmlns:p="http://schemas.openxmlformats.org/presentationml/2006/main">
   <p:sldMasterIdLst>
-    <p:sldMasterId xmlns:r="http://schemas.openxmlformats.org/officeDocument/2006/relationships" id="2147483648" r:id="R48659c2c14f4443e"/>
+    <p:sldMasterId xmlns:r="http://schemas.openxmlformats.org/officeDocument/2006/relationships" id="2147483648" r:id="Ra91e7e697a91448d"/>
   </p:sldMasterIdLst>
   <p:notesMasterIdLst>
-    <p:notesMasterId xmlns:r="http://schemas.openxmlformats.org/officeDocument/2006/relationships" r:id="Rc827f0764b55417d"/>
+    <p:notesMasterId xmlns:r="http://schemas.openxmlformats.org/officeDocument/2006/relationships" r:id="Rb2596c463c6a49b8"/>
   </p:notesMasterIdLst>
   <p:sldIdLst>
-    <p:sldId xmlns:r="http://schemas.openxmlformats.org/officeDocument/2006/relationships" id="256" r:id="R216b3717c7c941f6"/>
-    <p:sldId xmlns:r="http://schemas.openxmlformats.org/officeDocument/2006/relationships" id="257" r:id="Rac97ac2f6ff74b00"/>
-    <p:sldId xmlns:r="http://schemas.openxmlformats.org/officeDocument/2006/relationships" id="258" r:id="R35bdad85b2be4523"/>
-    <p:sldId xmlns:r="http://schemas.openxmlformats.org/officeDocument/2006/relationships" id="259" r:id="R39b75e7573364a88"/>
-    <p:sldId xmlns:r="http://schemas.openxmlformats.org/officeDocument/2006/relationships" id="260" r:id="R99b8b3fb409c4c0c"/>
-    <p:sldId xmlns:r="http://schemas.openxmlformats.org/officeDocument/2006/relationships" id="261" r:id="R671a5fded2b24f24"/>
-    <p:sldId xmlns:r="http://schemas.openxmlformats.org/officeDocument/2006/relationships" id="262" r:id="R5a85491c2bbd49e4"/>
-    <p:sldId xmlns:r="http://schemas.openxmlformats.org/officeDocument/2006/relationships" id="263" r:id="Rb3962ba0b3c04aed"/>
-    <p:sldId xmlns:r="http://schemas.openxmlformats.org/officeDocument/2006/relationships" id="264" r:id="R8d5f19c138614ea5"/>
-    <p:sldId xmlns:r="http://schemas.openxmlformats.org/officeDocument/2006/relationships" id="265" r:id="Rdaec287316364e57"/>
-    <p:sldId xmlns:r="http://schemas.openxmlformats.org/officeDocument/2006/relationships" id="266" r:id="R2af50e9882d34477"/>
-    <p:sldId xmlns:r="http://schemas.openxmlformats.org/officeDocument/2006/relationships" id="267" r:id="R2d2987e37fb742f6"/>
+    <p:sldId xmlns:r="http://schemas.openxmlformats.org/officeDocument/2006/relationships" id="256" r:id="R40395b0e0e31457e"/>
+    <p:sldId xmlns:r="http://schemas.openxmlformats.org/officeDocument/2006/relationships" id="257" r:id="Rfbcc47bf143a4234"/>
+    <p:sldId xmlns:r="http://schemas.openxmlformats.org/officeDocument/2006/relationships" id="258" r:id="R68c932b10be74191"/>
+    <p:sldId xmlns:r="http://schemas.openxmlformats.org/officeDocument/2006/relationships" id="259" r:id="R66c476b744b34889"/>
+    <p:sldId xmlns:r="http://schemas.openxmlformats.org/officeDocument/2006/relationships" id="260" r:id="R4749769af5c14a97"/>
+    <p:sldId xmlns:r="http://schemas.openxmlformats.org/officeDocument/2006/relationships" id="261" r:id="R16d51864ffad4ac3"/>
+    <p:sldId xmlns:r="http://schemas.openxmlformats.org/officeDocument/2006/relationships" id="262" r:id="Ra57393b82d6f443c"/>
+    <p:sldId xmlns:r="http://schemas.openxmlformats.org/officeDocument/2006/relationships" id="263" r:id="R6a5905661a6e4178"/>
+    <p:sldId xmlns:r="http://schemas.openxmlformats.org/officeDocument/2006/relationships" id="264" r:id="R1a4b574f2e934336"/>
+    <p:sldId xmlns:r="http://schemas.openxmlformats.org/officeDocument/2006/relationships" id="265" r:id="R0e7255cd186c4808"/>
+    <p:sldId xmlns:r="http://schemas.openxmlformats.org/officeDocument/2006/relationships" id="266" r:id="Rb53c1836d0ce49a6"/>
+    <p:sldId xmlns:r="http://schemas.openxmlformats.org/officeDocument/2006/relationships" id="267" r:id="Rd7208c4455cd4441"/>
   </p:sldIdLst>
   <p:sldSz cx="12192000" cy="6858000"/>
   <p:notesSz cx="6858000" cy="9144000"/>
@@ -873,7 +873,7 @@
           <a:lstStyle xmlns:a="http://schemas.openxmlformats.org/drawingml/2006/main"/>
           <a:p xmlns:a="http://schemas.openxmlformats.org/drawingml/2006/main">
             <a:r>
-              <a:t>I do. Reveal the question, setup and each calculation stage one click at a time. Pupils watch before copying. Model answer: 27, 32; add 5.</a:t>
+              <a:t>I do. Reveal the question, then reveal each mathematical change one click at a time. Point to the numbers and operation that changed before moving to the next line. Final answer: 27, 32; add 5.</a:t>
             </a:r>
           </a:p>
         </p:txBody>
@@ -1291,7 +1291,7 @@
   </p:cSld>
   <p:clrMap bg1="lt1" tx1="dk1" bg2="lt2" tx2="dk2" accent1="accent1" accent2="accent2" accent3="accent3" accent4="accent4" accent5="accent5" accent6="accent6" hlink="hlink" folHlink="folHlink"/>
   <p:sldLayoutIdLst>
-    <p:sldLayoutId xmlns:r="http://schemas.openxmlformats.org/officeDocument/2006/relationships" id="2147483649" r:id="R5ddc29bc8d7e4b56"/>
+    <p:sldLayoutId xmlns:r="http://schemas.openxmlformats.org/officeDocument/2006/relationships" id="2147483649" r:id="R5ef3afc3741b4443"/>
   </p:sldLayoutIdLst>
   <p:txStyles>
     <p:titleStyle>
@@ -1842,7 +1842,7 @@
           <p:cNvPr id="12" name="">
             <a:extLst xmlns:a="http://schemas.openxmlformats.org/drawingml/2006/main">
               <a:ext uri="{FF2B5EF4-FFF2-40B4-BE49-F238E27FC236}">
-                <a16:creationId xmlns:a16="http://schemas.microsoft.com/office/drawing/2014/main" id="{7FB3E074-B5B7-4F4B-8064-29A5B8F505E8}"/>
+                <a16:creationId xmlns:a16="http://schemas.microsoft.com/office/drawing/2014/main" id="{CB08DD3B-A66A-4B02-8117-0E44FD4B3D8B}"/>
               </a:ext>
             </a:extLst>
           </p:cNvPr>
@@ -1874,7 +1874,7 @@
           <p:cNvPr id="2" name="">
             <a:extLst xmlns:a="http://schemas.openxmlformats.org/drawingml/2006/main">
               <a:ext uri="{FF2B5EF4-FFF2-40B4-BE49-F238E27FC236}">
-                <a16:creationId xmlns:a16="http://schemas.microsoft.com/office/drawing/2014/main" id="{16AEEFE6-FB57-4A96-9BFB-00D657D7E215}"/>
+                <a16:creationId xmlns:a16="http://schemas.microsoft.com/office/drawing/2014/main" id="{341E58B0-73AD-4C1C-80E9-7C6D12C2708A}"/>
               </a:ext>
             </a:extLst>
           </p:cNvPr>
@@ -1931,7 +1931,7 @@
           <p:cNvPr id="3" name="">
             <a:extLst xmlns:a="http://schemas.openxmlformats.org/drawingml/2006/main">
               <a:ext uri="{FF2B5EF4-FFF2-40B4-BE49-F238E27FC236}">
-                <a16:creationId xmlns:a16="http://schemas.microsoft.com/office/drawing/2014/main" id="{34F1536B-7B54-4289-B296-5A47F26C165E}"/>
+                <a16:creationId xmlns:a16="http://schemas.microsoft.com/office/drawing/2014/main" id="{74BAFDF0-F01C-4455-A910-7C9A9B1B96F4}"/>
               </a:ext>
             </a:extLst>
           </p:cNvPr>
@@ -1965,7 +1965,7 @@
           <p:cNvPr id="4" name="">
             <a:extLst xmlns:a="http://schemas.openxmlformats.org/drawingml/2006/main">
               <a:ext uri="{FF2B5EF4-FFF2-40B4-BE49-F238E27FC236}">
-                <a16:creationId xmlns:a16="http://schemas.microsoft.com/office/drawing/2014/main" id="{FB44BF4D-732F-4928-BAD8-64825BCD436E}"/>
+                <a16:creationId xmlns:a16="http://schemas.microsoft.com/office/drawing/2014/main" id="{DBE74174-8DE6-43DB-AC8E-FF68C70A78CC}"/>
               </a:ext>
             </a:extLst>
           </p:cNvPr>
@@ -2022,7 +2022,7 @@
           <p:cNvPr id="5" name="">
             <a:extLst xmlns:a="http://schemas.openxmlformats.org/drawingml/2006/main">
               <a:ext uri="{FF2B5EF4-FFF2-40B4-BE49-F238E27FC236}">
-                <a16:creationId xmlns:a16="http://schemas.microsoft.com/office/drawing/2014/main" id="{3EA0EAD0-0F25-4177-A7D5-395D878E7660}"/>
+                <a16:creationId xmlns:a16="http://schemas.microsoft.com/office/drawing/2014/main" id="{EBCE1F18-D5E6-4BA7-8832-36EB809342B4}"/>
               </a:ext>
             </a:extLst>
           </p:cNvPr>
@@ -2079,7 +2079,7 @@
           <p:cNvPr id="6" name="">
             <a:extLst xmlns:a="http://schemas.openxmlformats.org/drawingml/2006/main">
               <a:ext uri="{FF2B5EF4-FFF2-40B4-BE49-F238E27FC236}">
-                <a16:creationId xmlns:a16="http://schemas.microsoft.com/office/drawing/2014/main" id="{835C6154-92F6-4B28-B3BC-F2B38AD3B872}"/>
+                <a16:creationId xmlns:a16="http://schemas.microsoft.com/office/drawing/2014/main" id="{37CB006E-4B93-4DAE-8E49-2326E2DF67B9}"/>
               </a:ext>
             </a:extLst>
           </p:cNvPr>
@@ -2113,7 +2113,7 @@
           <p:cNvPr id="7" name="">
             <a:extLst xmlns:a="http://schemas.openxmlformats.org/drawingml/2006/main">
               <a:ext uri="{FF2B5EF4-FFF2-40B4-BE49-F238E27FC236}">
-                <a16:creationId xmlns:a16="http://schemas.microsoft.com/office/drawing/2014/main" id="{DF23329B-F00E-43E0-90BE-6CE16E08DFC5}"/>
+                <a16:creationId xmlns:a16="http://schemas.microsoft.com/office/drawing/2014/main" id="{F21CA7D8-CE6B-4E0B-807D-33A321B365A1}"/>
               </a:ext>
             </a:extLst>
           </p:cNvPr>
@@ -2170,7 +2170,7 @@
           <p:cNvPr id="8" name="">
             <a:extLst xmlns:a="http://schemas.openxmlformats.org/drawingml/2006/main">
               <a:ext uri="{FF2B5EF4-FFF2-40B4-BE49-F238E27FC236}">
-                <a16:creationId xmlns:a16="http://schemas.microsoft.com/office/drawing/2014/main" id="{FD690172-6CB2-4BBD-A772-39326B6B126A}"/>
+                <a16:creationId xmlns:a16="http://schemas.microsoft.com/office/drawing/2014/main" id="{11DE934B-40D6-4912-9434-8E5C56C70A40}"/>
               </a:ext>
             </a:extLst>
           </p:cNvPr>
@@ -2227,7 +2227,7 @@
           <p:cNvPr id="9" name="">
             <a:extLst xmlns:a="http://schemas.openxmlformats.org/drawingml/2006/main">
               <a:ext uri="{FF2B5EF4-FFF2-40B4-BE49-F238E27FC236}">
-                <a16:creationId xmlns:a16="http://schemas.microsoft.com/office/drawing/2014/main" id="{E72DF589-378C-4E24-A550-2CC3FC43C41A}"/>
+                <a16:creationId xmlns:a16="http://schemas.microsoft.com/office/drawing/2014/main" id="{67AE705A-D44C-494D-B550-46611C0C2EF3}"/>
               </a:ext>
             </a:extLst>
           </p:cNvPr>
@@ -2284,7 +2284,7 @@
           <p:cNvPr id="10" name="">
             <a:extLst xmlns:a="http://schemas.openxmlformats.org/drawingml/2006/main">
               <a:ext uri="{FF2B5EF4-FFF2-40B4-BE49-F238E27FC236}">
-                <a16:creationId xmlns:a16="http://schemas.microsoft.com/office/drawing/2014/main" id="{824D77AC-15AC-4A6D-B4CA-DFA950B27E11}"/>
+                <a16:creationId xmlns:a16="http://schemas.microsoft.com/office/drawing/2014/main" id="{817E21C3-30E7-4469-9194-FEC5724D9B65}"/>
               </a:ext>
             </a:extLst>
           </p:cNvPr>
@@ -2341,7 +2341,7 @@
           <p:cNvPr id="11" name="">
             <a:extLst xmlns:a="http://schemas.openxmlformats.org/drawingml/2006/main">
               <a:ext uri="{FF2B5EF4-FFF2-40B4-BE49-F238E27FC236}">
-                <a16:creationId xmlns:a16="http://schemas.microsoft.com/office/drawing/2014/main" id="{8B8B62F7-D642-4383-8D7F-DEA79A12EEEB}"/>
+                <a16:creationId xmlns:a16="http://schemas.microsoft.com/office/drawing/2014/main" id="{D0D17C25-F569-46E7-90E5-244CFEB38F07}"/>
               </a:ext>
             </a:extLst>
           </p:cNvPr>
@@ -2396,7 +2396,7 @@
     </p:spTree>
     <p:extLst>
       <p:ext uri="{BB962C8B-B14F-4D97-AF65-F5344CB8AC3E}">
-        <p14:creationId xmlns:p14="http://schemas.microsoft.com/office/powerpoint/2010/main" val="508087358"/>
+        <p14:creationId xmlns:p14="http://schemas.microsoft.com/office/powerpoint/2010/main" val="104803277"/>
       </p:ext>
     </p:extLst>
   </p:cSld>
@@ -2427,7 +2427,7 @@
           <p:cNvPr id="14" name="">
             <a:extLst xmlns:a="http://schemas.openxmlformats.org/drawingml/2006/main">
               <a:ext uri="{FF2B5EF4-FFF2-40B4-BE49-F238E27FC236}">
-                <a16:creationId xmlns:a16="http://schemas.microsoft.com/office/drawing/2014/main" id="{5A5E33AD-AF71-4F79-94D0-2D5C631469DF}"/>
+                <a16:creationId xmlns:a16="http://schemas.microsoft.com/office/drawing/2014/main" id="{299BD90D-EA9F-4ACE-8939-3FD6F90BA7D0}"/>
               </a:ext>
             </a:extLst>
           </p:cNvPr>
@@ -2459,7 +2459,7 @@
           <p:cNvPr id="2" name="">
             <a:extLst xmlns:a="http://schemas.openxmlformats.org/drawingml/2006/main">
               <a:ext uri="{FF2B5EF4-FFF2-40B4-BE49-F238E27FC236}">
-                <a16:creationId xmlns:a16="http://schemas.microsoft.com/office/drawing/2014/main" id="{702B14A7-0997-4220-A371-83919A90B6B9}"/>
+                <a16:creationId xmlns:a16="http://schemas.microsoft.com/office/drawing/2014/main" id="{74D759EE-A23E-4784-9FAC-41038F58A685}"/>
               </a:ext>
             </a:extLst>
           </p:cNvPr>
@@ -2516,7 +2516,7 @@
           <p:cNvPr id="3" name="">
             <a:extLst xmlns:a="http://schemas.openxmlformats.org/drawingml/2006/main">
               <a:ext uri="{FF2B5EF4-FFF2-40B4-BE49-F238E27FC236}">
-                <a16:creationId xmlns:a16="http://schemas.microsoft.com/office/drawing/2014/main" id="{97C4A64C-4B18-4573-8202-7B1F0CAA1F77}"/>
+                <a16:creationId xmlns:a16="http://schemas.microsoft.com/office/drawing/2014/main" id="{2878DB9E-BFF4-45C6-BD3A-53464D229A9C}"/>
               </a:ext>
             </a:extLst>
           </p:cNvPr>
@@ -2548,7 +2548,7 @@
           <p:cNvPr id="4" name="">
             <a:extLst xmlns:a="http://schemas.openxmlformats.org/drawingml/2006/main">
               <a:ext uri="{FF2B5EF4-FFF2-40B4-BE49-F238E27FC236}">
-                <a16:creationId xmlns:a16="http://schemas.microsoft.com/office/drawing/2014/main" id="{CBB51EBA-9B1D-4754-BFFE-B243980B0BA4}"/>
+                <a16:creationId xmlns:a16="http://schemas.microsoft.com/office/drawing/2014/main" id="{9C70B6ED-8A0F-4A9F-97FA-16754111C340}"/>
               </a:ext>
             </a:extLst>
           </p:cNvPr>
@@ -2605,7 +2605,7 @@
           <p:cNvPr id="5" name="">
             <a:extLst xmlns:a="http://schemas.openxmlformats.org/drawingml/2006/main">
               <a:ext uri="{FF2B5EF4-FFF2-40B4-BE49-F238E27FC236}">
-                <a16:creationId xmlns:a16="http://schemas.microsoft.com/office/drawing/2014/main" id="{23862626-8DAE-478A-A1B4-559F70CC4635}"/>
+                <a16:creationId xmlns:a16="http://schemas.microsoft.com/office/drawing/2014/main" id="{CAE50924-43AA-4CFC-AD85-B1DE7C31CA8E}"/>
               </a:ext>
             </a:extLst>
           </p:cNvPr>
@@ -2662,7 +2662,7 @@
           <p:cNvPr id="6" name="">
             <a:extLst xmlns:a="http://schemas.openxmlformats.org/drawingml/2006/main">
               <a:ext uri="{FF2B5EF4-FFF2-40B4-BE49-F238E27FC236}">
-                <a16:creationId xmlns:a16="http://schemas.microsoft.com/office/drawing/2014/main" id="{F954F9B2-DC51-4103-B065-BDBA564510B9}"/>
+                <a16:creationId xmlns:a16="http://schemas.microsoft.com/office/drawing/2014/main" id="{79E5AE9E-243F-45BF-9D18-3C621D59C04C}"/>
               </a:ext>
             </a:extLst>
           </p:cNvPr>
@@ -2719,7 +2719,7 @@
           <p:cNvPr id="7" name="">
             <a:extLst xmlns:a="http://schemas.openxmlformats.org/drawingml/2006/main">
               <a:ext uri="{FF2B5EF4-FFF2-40B4-BE49-F238E27FC236}">
-                <a16:creationId xmlns:a16="http://schemas.microsoft.com/office/drawing/2014/main" id="{89099950-909D-4105-AD01-6E45A325C2F3}"/>
+                <a16:creationId xmlns:a16="http://schemas.microsoft.com/office/drawing/2014/main" id="{55ACF5BE-B5A2-4EA7-9D63-99600E772EDC}"/>
               </a:ext>
             </a:extLst>
           </p:cNvPr>
@@ -2751,7 +2751,7 @@
           <p:cNvPr id="8" name="">
             <a:extLst xmlns:a="http://schemas.openxmlformats.org/drawingml/2006/main">
               <a:ext uri="{FF2B5EF4-FFF2-40B4-BE49-F238E27FC236}">
-                <a16:creationId xmlns:a16="http://schemas.microsoft.com/office/drawing/2014/main" id="{1686CEEB-F783-4EFE-A763-B5DEFDC2034C}"/>
+                <a16:creationId xmlns:a16="http://schemas.microsoft.com/office/drawing/2014/main" id="{7CFFA37A-7A5D-4D6B-BB1A-FC929AC58F56}"/>
               </a:ext>
             </a:extLst>
           </p:cNvPr>
@@ -2808,7 +2808,7 @@
           <p:cNvPr id="9" name="">
             <a:extLst xmlns:a="http://schemas.openxmlformats.org/drawingml/2006/main">
               <a:ext uri="{FF2B5EF4-FFF2-40B4-BE49-F238E27FC236}">
-                <a16:creationId xmlns:a16="http://schemas.microsoft.com/office/drawing/2014/main" id="{A6869EF2-AE60-4679-913D-387FB70E6F75}"/>
+                <a16:creationId xmlns:a16="http://schemas.microsoft.com/office/drawing/2014/main" id="{85B8A358-047F-4D36-AF0E-F2D5EB1C0CDA}"/>
               </a:ext>
             </a:extLst>
           </p:cNvPr>
@@ -2865,7 +2865,7 @@
           <p:cNvPr id="10" name="">
             <a:extLst xmlns:a="http://schemas.openxmlformats.org/drawingml/2006/main">
               <a:ext uri="{FF2B5EF4-FFF2-40B4-BE49-F238E27FC236}">
-                <a16:creationId xmlns:a16="http://schemas.microsoft.com/office/drawing/2014/main" id="{3941B582-57AF-4A39-B77F-00C257E9AD36}"/>
+                <a16:creationId xmlns:a16="http://schemas.microsoft.com/office/drawing/2014/main" id="{5E653057-FFA2-464D-9C37-78401D1FFA94}"/>
               </a:ext>
             </a:extLst>
           </p:cNvPr>
@@ -2922,7 +2922,7 @@
           <p:cNvPr id="11" name="">
             <a:extLst xmlns:a="http://schemas.openxmlformats.org/drawingml/2006/main">
               <a:ext uri="{FF2B5EF4-FFF2-40B4-BE49-F238E27FC236}">
-                <a16:creationId xmlns:a16="http://schemas.microsoft.com/office/drawing/2014/main" id="{43281E57-EEC8-4F65-9528-CB3970944DF5}"/>
+                <a16:creationId xmlns:a16="http://schemas.microsoft.com/office/drawing/2014/main" id="{1A555F1C-7E5E-4467-9D82-9B3A5D0BA300}"/>
               </a:ext>
             </a:extLst>
           </p:cNvPr>
@@ -2979,7 +2979,7 @@
           <p:cNvPr id="12" name="">
             <a:extLst xmlns:a="http://schemas.openxmlformats.org/drawingml/2006/main">
               <a:ext uri="{FF2B5EF4-FFF2-40B4-BE49-F238E27FC236}">
-                <a16:creationId xmlns:a16="http://schemas.microsoft.com/office/drawing/2014/main" id="{6F0AED54-D62B-416B-B97F-C553A197E5A0}"/>
+                <a16:creationId xmlns:a16="http://schemas.microsoft.com/office/drawing/2014/main" id="{A3B65E8D-F9C4-4472-B66A-76F24FC24D79}"/>
               </a:ext>
             </a:extLst>
           </p:cNvPr>
@@ -3036,7 +3036,7 @@
           <p:cNvPr id="13" name="">
             <a:extLst xmlns:a="http://schemas.openxmlformats.org/drawingml/2006/main">
               <a:ext uri="{FF2B5EF4-FFF2-40B4-BE49-F238E27FC236}">
-                <a16:creationId xmlns:a16="http://schemas.microsoft.com/office/drawing/2014/main" id="{9A269347-12E9-4582-B00A-91967FE897BD}"/>
+                <a16:creationId xmlns:a16="http://schemas.microsoft.com/office/drawing/2014/main" id="{8AE8050A-E6DC-457D-90F8-91E3A4F034C1}"/>
               </a:ext>
             </a:extLst>
           </p:cNvPr>
@@ -3091,7 +3091,7 @@
     </p:spTree>
     <p:extLst>
       <p:ext uri="{BB962C8B-B14F-4D97-AF65-F5344CB8AC3E}">
-        <p14:creationId xmlns:p14="http://schemas.microsoft.com/office/powerpoint/2010/main" val="1817864005"/>
+        <p14:creationId xmlns:p14="http://schemas.microsoft.com/office/powerpoint/2010/main" val="132689850"/>
       </p:ext>
     </p:extLst>
   </p:cSld>
@@ -3292,7 +3292,7 @@
           <p:cNvPr id="19" name="">
             <a:extLst xmlns:a="http://schemas.openxmlformats.org/drawingml/2006/main">
               <a:ext uri="{FF2B5EF4-FFF2-40B4-BE49-F238E27FC236}">
-                <a16:creationId xmlns:a16="http://schemas.microsoft.com/office/drawing/2014/main" id="{ECD303C7-613A-4EC2-A157-D61C0179D3C7}"/>
+                <a16:creationId xmlns:a16="http://schemas.microsoft.com/office/drawing/2014/main" id="{6E9483C3-6C05-4A74-9C1D-175ECBA29338}"/>
               </a:ext>
             </a:extLst>
           </p:cNvPr>
@@ -3324,7 +3324,7 @@
           <p:cNvPr id="2" name="">
             <a:extLst xmlns:a="http://schemas.openxmlformats.org/drawingml/2006/main">
               <a:ext uri="{FF2B5EF4-FFF2-40B4-BE49-F238E27FC236}">
-                <a16:creationId xmlns:a16="http://schemas.microsoft.com/office/drawing/2014/main" id="{C1EE9278-E6E0-42D0-9803-670BC0AD7951}"/>
+                <a16:creationId xmlns:a16="http://schemas.microsoft.com/office/drawing/2014/main" id="{C8BEFDF1-1F83-4661-A34B-501C35457F84}"/>
               </a:ext>
             </a:extLst>
           </p:cNvPr>
@@ -3381,7 +3381,7 @@
           <p:cNvPr id="3" name="">
             <a:extLst xmlns:a="http://schemas.openxmlformats.org/drawingml/2006/main">
               <a:ext uri="{FF2B5EF4-FFF2-40B4-BE49-F238E27FC236}">
-                <a16:creationId xmlns:a16="http://schemas.microsoft.com/office/drawing/2014/main" id="{3021AD37-F3B2-41C8-8E12-E2046854B481}"/>
+                <a16:creationId xmlns:a16="http://schemas.microsoft.com/office/drawing/2014/main" id="{89FDE831-EB48-463D-A7B1-A1FD84C342DC}"/>
               </a:ext>
             </a:extLst>
           </p:cNvPr>
@@ -3413,7 +3413,7 @@
           <p:cNvPr id="4" name="">
             <a:extLst xmlns:a="http://schemas.openxmlformats.org/drawingml/2006/main">
               <a:ext uri="{FF2B5EF4-FFF2-40B4-BE49-F238E27FC236}">
-                <a16:creationId xmlns:a16="http://schemas.microsoft.com/office/drawing/2014/main" id="{BF3BB856-420E-465B-AAFA-653AF8973594}"/>
+                <a16:creationId xmlns:a16="http://schemas.microsoft.com/office/drawing/2014/main" id="{65AEEC21-028B-4CAB-894F-033BBC708264}"/>
               </a:ext>
             </a:extLst>
           </p:cNvPr>
@@ -3470,7 +3470,7 @@
           <p:cNvPr id="5" name="">
             <a:extLst xmlns:a="http://schemas.openxmlformats.org/drawingml/2006/main">
               <a:ext uri="{FF2B5EF4-FFF2-40B4-BE49-F238E27FC236}">
-                <a16:creationId xmlns:a16="http://schemas.microsoft.com/office/drawing/2014/main" id="{533D2D56-5C9F-4633-906E-0820A7674486}"/>
+                <a16:creationId xmlns:a16="http://schemas.microsoft.com/office/drawing/2014/main" id="{F8AFB155-0EFA-46A4-945F-BC8543883B38}"/>
               </a:ext>
             </a:extLst>
           </p:cNvPr>
@@ -3527,7 +3527,7 @@
           <p:cNvPr id="6" name="">
             <a:extLst xmlns:a="http://schemas.openxmlformats.org/drawingml/2006/main">
               <a:ext uri="{FF2B5EF4-FFF2-40B4-BE49-F238E27FC236}">
-                <a16:creationId xmlns:a16="http://schemas.microsoft.com/office/drawing/2014/main" id="{338C9531-DB4A-4AB7-9170-E766979485EB}"/>
+                <a16:creationId xmlns:a16="http://schemas.microsoft.com/office/drawing/2014/main" id="{4415ED35-B17D-4DC1-9207-34D45AF7C5B9}"/>
               </a:ext>
             </a:extLst>
           </p:cNvPr>
@@ -3584,7 +3584,7 @@
           <p:cNvPr id="7" name="">
             <a:extLst xmlns:a="http://schemas.openxmlformats.org/drawingml/2006/main">
               <a:ext uri="{FF2B5EF4-FFF2-40B4-BE49-F238E27FC236}">
-                <a16:creationId xmlns:a16="http://schemas.microsoft.com/office/drawing/2014/main" id="{21783385-0B2D-4E29-AD7A-FD7AE45E0ADE}"/>
+                <a16:creationId xmlns:a16="http://schemas.microsoft.com/office/drawing/2014/main" id="{756F4998-CBD8-4244-BC49-2F2AA045987B}"/>
               </a:ext>
             </a:extLst>
           </p:cNvPr>
@@ -3616,7 +3616,7 @@
           <p:cNvPr id="8" name="">
             <a:extLst xmlns:a="http://schemas.openxmlformats.org/drawingml/2006/main">
               <a:ext uri="{FF2B5EF4-FFF2-40B4-BE49-F238E27FC236}">
-                <a16:creationId xmlns:a16="http://schemas.microsoft.com/office/drawing/2014/main" id="{C5E5D923-2CE3-43FF-84D5-9BD0AA3BC395}"/>
+                <a16:creationId xmlns:a16="http://schemas.microsoft.com/office/drawing/2014/main" id="{7AA65A56-E779-4C8C-88EF-2185B9EFC5D3}"/>
               </a:ext>
             </a:extLst>
           </p:cNvPr>
@@ -3673,7 +3673,7 @@
           <p:cNvPr id="9" name="">
             <a:extLst xmlns:a="http://schemas.openxmlformats.org/drawingml/2006/main">
               <a:ext uri="{FF2B5EF4-FFF2-40B4-BE49-F238E27FC236}">
-                <a16:creationId xmlns:a16="http://schemas.microsoft.com/office/drawing/2014/main" id="{2D4991CB-B14C-4526-BF71-FE4955312988}"/>
+                <a16:creationId xmlns:a16="http://schemas.microsoft.com/office/drawing/2014/main" id="{B85FB06E-F298-49F4-AA4C-D8715101B555}"/>
               </a:ext>
             </a:extLst>
           </p:cNvPr>
@@ -3730,7 +3730,7 @@
           <p:cNvPr id="10" name="">
             <a:extLst xmlns:a="http://schemas.openxmlformats.org/drawingml/2006/main">
               <a:ext uri="{FF2B5EF4-FFF2-40B4-BE49-F238E27FC236}">
-                <a16:creationId xmlns:a16="http://schemas.microsoft.com/office/drawing/2014/main" id="{58BC0551-42F2-46F1-BBF6-8AB3C14AC35E}"/>
+                <a16:creationId xmlns:a16="http://schemas.microsoft.com/office/drawing/2014/main" id="{B1F79F35-5882-4D5C-B5EE-2A0F7A942D66}"/>
               </a:ext>
             </a:extLst>
           </p:cNvPr>
@@ -3787,7 +3787,7 @@
           <p:cNvPr id="11" name="">
             <a:extLst xmlns:a="http://schemas.openxmlformats.org/drawingml/2006/main">
               <a:ext uri="{FF2B5EF4-FFF2-40B4-BE49-F238E27FC236}">
-                <a16:creationId xmlns:a16="http://schemas.microsoft.com/office/drawing/2014/main" id="{C63A80C7-959A-45D8-B527-7B280880B895}"/>
+                <a16:creationId xmlns:a16="http://schemas.microsoft.com/office/drawing/2014/main" id="{E019398A-83A8-4A5A-9971-BD2417E16FF5}"/>
               </a:ext>
             </a:extLst>
           </p:cNvPr>
@@ -3821,7 +3821,7 @@
           <p:cNvPr id="12" name="">
             <a:extLst xmlns:a="http://schemas.openxmlformats.org/drawingml/2006/main">
               <a:ext uri="{FF2B5EF4-FFF2-40B4-BE49-F238E27FC236}">
-                <a16:creationId xmlns:a16="http://schemas.microsoft.com/office/drawing/2014/main" id="{DE7EA24B-E3FD-498C-BAA3-61EDEEFAA5A6}"/>
+                <a16:creationId xmlns:a16="http://schemas.microsoft.com/office/drawing/2014/main" id="{AEF17122-B7F4-4558-AF11-C336DCB2391E}"/>
               </a:ext>
             </a:extLst>
           </p:cNvPr>
@@ -3878,7 +3878,7 @@
           <p:cNvPr id="13" name="">
             <a:extLst xmlns:a="http://schemas.openxmlformats.org/drawingml/2006/main">
               <a:ext uri="{FF2B5EF4-FFF2-40B4-BE49-F238E27FC236}">
-                <a16:creationId xmlns:a16="http://schemas.microsoft.com/office/drawing/2014/main" id="{0A8C0EB6-C478-425D-9C41-7A35FBFD9433}"/>
+                <a16:creationId xmlns:a16="http://schemas.microsoft.com/office/drawing/2014/main" id="{1C4C49B6-8500-4CAA-8953-B5FA9867E00C}"/>
               </a:ext>
             </a:extLst>
           </p:cNvPr>
@@ -3935,7 +3935,7 @@
           <p:cNvPr id="14" name="">
             <a:extLst xmlns:a="http://schemas.openxmlformats.org/drawingml/2006/main">
               <a:ext uri="{FF2B5EF4-FFF2-40B4-BE49-F238E27FC236}">
-                <a16:creationId xmlns:a16="http://schemas.microsoft.com/office/drawing/2014/main" id="{9D0575B5-CD90-4FBE-8A14-4DD5D5FFFB0E}"/>
+                <a16:creationId xmlns:a16="http://schemas.microsoft.com/office/drawing/2014/main" id="{2DB0B3BD-D383-4448-A7BC-F6AFC0E77A48}"/>
               </a:ext>
             </a:extLst>
           </p:cNvPr>
@@ -3992,7 +3992,7 @@
           <p:cNvPr id="15" name="">
             <a:extLst xmlns:a="http://schemas.openxmlformats.org/drawingml/2006/main">
               <a:ext uri="{FF2B5EF4-FFF2-40B4-BE49-F238E27FC236}">
-                <a16:creationId xmlns:a16="http://schemas.microsoft.com/office/drawing/2014/main" id="{3299D157-46BD-4366-9917-3AD3A1DA93BC}"/>
+                <a16:creationId xmlns:a16="http://schemas.microsoft.com/office/drawing/2014/main" id="{5CE2182E-4C2A-41E4-947B-69340077DD62}"/>
               </a:ext>
             </a:extLst>
           </p:cNvPr>
@@ -4026,7 +4026,7 @@
           <p:cNvPr id="16" name="">
             <a:extLst xmlns:a="http://schemas.openxmlformats.org/drawingml/2006/main">
               <a:ext uri="{FF2B5EF4-FFF2-40B4-BE49-F238E27FC236}">
-                <a16:creationId xmlns:a16="http://schemas.microsoft.com/office/drawing/2014/main" id="{922AFD94-E896-41EA-B2AB-99758D9A27F1}"/>
+                <a16:creationId xmlns:a16="http://schemas.microsoft.com/office/drawing/2014/main" id="{9582511E-C2D5-4318-984E-492525FF8EF3}"/>
               </a:ext>
             </a:extLst>
           </p:cNvPr>
@@ -4083,7 +4083,7 @@
           <p:cNvPr id="17" name="">
             <a:extLst xmlns:a="http://schemas.openxmlformats.org/drawingml/2006/main">
               <a:ext uri="{FF2B5EF4-FFF2-40B4-BE49-F238E27FC236}">
-                <a16:creationId xmlns:a16="http://schemas.microsoft.com/office/drawing/2014/main" id="{BF49F18C-9718-4346-8F2B-4BEFF951459C}"/>
+                <a16:creationId xmlns:a16="http://schemas.microsoft.com/office/drawing/2014/main" id="{E32AD0B1-2EAF-41F6-90BF-313BBA5AE352}"/>
               </a:ext>
             </a:extLst>
           </p:cNvPr>
@@ -4140,7 +4140,7 @@
           <p:cNvPr id="18" name="">
             <a:extLst xmlns:a="http://schemas.openxmlformats.org/drawingml/2006/main">
               <a:ext uri="{FF2B5EF4-FFF2-40B4-BE49-F238E27FC236}">
-                <a16:creationId xmlns:a16="http://schemas.microsoft.com/office/drawing/2014/main" id="{5F3EAE89-4A04-403B-97E4-13BA15AC8DCA}"/>
+                <a16:creationId xmlns:a16="http://schemas.microsoft.com/office/drawing/2014/main" id="{E4FE69A7-4D52-417B-A276-35A887346A1C}"/>
               </a:ext>
             </a:extLst>
           </p:cNvPr>
@@ -4195,7 +4195,7 @@
     </p:spTree>
     <p:extLst>
       <p:ext uri="{BB962C8B-B14F-4D97-AF65-F5344CB8AC3E}">
-        <p14:creationId xmlns:p14="http://schemas.microsoft.com/office/powerpoint/2010/main" val="610800379"/>
+        <p14:creationId xmlns:p14="http://schemas.microsoft.com/office/powerpoint/2010/main" val="862739719"/>
       </p:ext>
     </p:extLst>
   </p:cSld>
@@ -4350,7 +4350,7 @@
           <p:cNvPr id="23" name="">
             <a:extLst xmlns:a="http://schemas.openxmlformats.org/drawingml/2006/main">
               <a:ext uri="{FF2B5EF4-FFF2-40B4-BE49-F238E27FC236}">
-                <a16:creationId xmlns:a16="http://schemas.microsoft.com/office/drawing/2014/main" id="{0557BF70-3039-49AB-8C5E-B248E31640ED}"/>
+                <a16:creationId xmlns:a16="http://schemas.microsoft.com/office/drawing/2014/main" id="{221F782E-72ED-4161-9051-990EF17B1F55}"/>
               </a:ext>
             </a:extLst>
           </p:cNvPr>
@@ -4382,7 +4382,7 @@
           <p:cNvPr id="2" name="">
             <a:extLst xmlns:a="http://schemas.openxmlformats.org/drawingml/2006/main">
               <a:ext uri="{FF2B5EF4-FFF2-40B4-BE49-F238E27FC236}">
-                <a16:creationId xmlns:a16="http://schemas.microsoft.com/office/drawing/2014/main" id="{F6413C3E-142D-4742-87BD-9BD9A45C3D2A}"/>
+                <a16:creationId xmlns:a16="http://schemas.microsoft.com/office/drawing/2014/main" id="{63586A79-4187-4244-AC2B-4856E431DA55}"/>
               </a:ext>
             </a:extLst>
           </p:cNvPr>
@@ -4439,7 +4439,7 @@
           <p:cNvPr id="3" name="">
             <a:extLst xmlns:a="http://schemas.openxmlformats.org/drawingml/2006/main">
               <a:ext uri="{FF2B5EF4-FFF2-40B4-BE49-F238E27FC236}">
-                <a16:creationId xmlns:a16="http://schemas.microsoft.com/office/drawing/2014/main" id="{B24DF101-299B-4D78-928C-8A1E84A0CCD4}"/>
+                <a16:creationId xmlns:a16="http://schemas.microsoft.com/office/drawing/2014/main" id="{68FCEE33-FCB3-475A-83C5-5F6D2BAD4E6B}"/>
               </a:ext>
             </a:extLst>
           </p:cNvPr>
@@ -4471,7 +4471,7 @@
           <p:cNvPr id="4" name="">
             <a:extLst xmlns:a="http://schemas.openxmlformats.org/drawingml/2006/main">
               <a:ext uri="{FF2B5EF4-FFF2-40B4-BE49-F238E27FC236}">
-                <a16:creationId xmlns:a16="http://schemas.microsoft.com/office/drawing/2014/main" id="{7DC14497-EBCB-41A5-B642-F9D785DA89D0}"/>
+                <a16:creationId xmlns:a16="http://schemas.microsoft.com/office/drawing/2014/main" id="{1FE6A4AF-2005-4CEA-AE2C-1C19D8BAE026}"/>
               </a:ext>
             </a:extLst>
           </p:cNvPr>
@@ -4528,7 +4528,7 @@
           <p:cNvPr id="5" name="">
             <a:extLst xmlns:a="http://schemas.openxmlformats.org/drawingml/2006/main">
               <a:ext uri="{FF2B5EF4-FFF2-40B4-BE49-F238E27FC236}">
-                <a16:creationId xmlns:a16="http://schemas.microsoft.com/office/drawing/2014/main" id="{D8788187-03A2-40BE-833A-A70206E0406B}"/>
+                <a16:creationId xmlns:a16="http://schemas.microsoft.com/office/drawing/2014/main" id="{47485730-B441-4A5B-9945-D40FAF9C59AC}"/>
               </a:ext>
             </a:extLst>
           </p:cNvPr>
@@ -4585,7 +4585,7 @@
           <p:cNvPr id="6" name="">
             <a:extLst xmlns:a="http://schemas.openxmlformats.org/drawingml/2006/main">
               <a:ext uri="{FF2B5EF4-FFF2-40B4-BE49-F238E27FC236}">
-                <a16:creationId xmlns:a16="http://schemas.microsoft.com/office/drawing/2014/main" id="{78623343-8755-4E92-A51E-E79E4C9D0A01}"/>
+                <a16:creationId xmlns:a16="http://schemas.microsoft.com/office/drawing/2014/main" id="{8DE413FC-FB13-4966-B186-B9A76B3740DE}"/>
               </a:ext>
             </a:extLst>
           </p:cNvPr>
@@ -4642,7 +4642,7 @@
           <p:cNvPr id="7" name="">
             <a:extLst xmlns:a="http://schemas.openxmlformats.org/drawingml/2006/main">
               <a:ext uri="{FF2B5EF4-FFF2-40B4-BE49-F238E27FC236}">
-                <a16:creationId xmlns:a16="http://schemas.microsoft.com/office/drawing/2014/main" id="{6D78CBFD-CFB2-45A8-BDC5-1E2542EEAE83}"/>
+                <a16:creationId xmlns:a16="http://schemas.microsoft.com/office/drawing/2014/main" id="{3904AB80-2005-4F9A-9094-8CC000B81707}"/>
               </a:ext>
             </a:extLst>
           </p:cNvPr>
@@ -4674,7 +4674,7 @@
           <p:cNvPr id="8" name="">
             <a:extLst xmlns:a="http://schemas.openxmlformats.org/drawingml/2006/main">
               <a:ext uri="{FF2B5EF4-FFF2-40B4-BE49-F238E27FC236}">
-                <a16:creationId xmlns:a16="http://schemas.microsoft.com/office/drawing/2014/main" id="{F803808B-11EF-4B76-9300-F2D9BD51D4FE}"/>
+                <a16:creationId xmlns:a16="http://schemas.microsoft.com/office/drawing/2014/main" id="{5F6B9B35-628E-4B81-BA0C-F91C35D755CF}"/>
               </a:ext>
             </a:extLst>
           </p:cNvPr>
@@ -4731,7 +4731,7 @@
           <p:cNvPr id="9" name="">
             <a:extLst xmlns:a="http://schemas.openxmlformats.org/drawingml/2006/main">
               <a:ext uri="{FF2B5EF4-FFF2-40B4-BE49-F238E27FC236}">
-                <a16:creationId xmlns:a16="http://schemas.microsoft.com/office/drawing/2014/main" id="{95C5BB5C-8449-44BC-A85D-F15CC79B89AA}"/>
+                <a16:creationId xmlns:a16="http://schemas.microsoft.com/office/drawing/2014/main" id="{556F5B9B-0B07-43C1-B82C-FBF0FB9A03D0}"/>
               </a:ext>
             </a:extLst>
           </p:cNvPr>
@@ -4788,7 +4788,7 @@
           <p:cNvPr id="10" name="">
             <a:extLst xmlns:a="http://schemas.openxmlformats.org/drawingml/2006/main">
               <a:ext uri="{FF2B5EF4-FFF2-40B4-BE49-F238E27FC236}">
-                <a16:creationId xmlns:a16="http://schemas.microsoft.com/office/drawing/2014/main" id="{729E14EC-B93D-4949-BB8F-F6184576C3D9}"/>
+                <a16:creationId xmlns:a16="http://schemas.microsoft.com/office/drawing/2014/main" id="{5E2A5ECC-40A2-4B13-9987-73E058AAC5A7}"/>
               </a:ext>
             </a:extLst>
           </p:cNvPr>
@@ -4822,7 +4822,7 @@
           <p:cNvPr id="11" name="">
             <a:extLst xmlns:a="http://schemas.openxmlformats.org/drawingml/2006/main">
               <a:ext uri="{FF2B5EF4-FFF2-40B4-BE49-F238E27FC236}">
-                <a16:creationId xmlns:a16="http://schemas.microsoft.com/office/drawing/2014/main" id="{FDA7AA38-5634-4292-B78E-B62B78C720DD}"/>
+                <a16:creationId xmlns:a16="http://schemas.microsoft.com/office/drawing/2014/main" id="{C380B99C-E926-48D0-AD6B-904619DC333E}"/>
               </a:ext>
             </a:extLst>
           </p:cNvPr>
@@ -4854,7 +4854,7 @@
           <p:cNvPr id="12" name="">
             <a:extLst xmlns:a="http://schemas.openxmlformats.org/drawingml/2006/main">
               <a:ext uri="{FF2B5EF4-FFF2-40B4-BE49-F238E27FC236}">
-                <a16:creationId xmlns:a16="http://schemas.microsoft.com/office/drawing/2014/main" id="{1D8F041E-D139-45B7-ADE3-16660D42B4E5}"/>
+                <a16:creationId xmlns:a16="http://schemas.microsoft.com/office/drawing/2014/main" id="{541FE0FF-2D97-4F62-90E8-23E478601816}"/>
               </a:ext>
             </a:extLst>
           </p:cNvPr>
@@ -4911,7 +4911,7 @@
           <p:cNvPr id="13" name="">
             <a:extLst xmlns:a="http://schemas.openxmlformats.org/drawingml/2006/main">
               <a:ext uri="{FF2B5EF4-FFF2-40B4-BE49-F238E27FC236}">
-                <a16:creationId xmlns:a16="http://schemas.microsoft.com/office/drawing/2014/main" id="{2AF05C2D-C0A9-458E-9241-A5844D13533C}"/>
+                <a16:creationId xmlns:a16="http://schemas.microsoft.com/office/drawing/2014/main" id="{5CDBA513-61FE-4DBB-A0A5-43980D8CAB86}"/>
               </a:ext>
             </a:extLst>
           </p:cNvPr>
@@ -4968,7 +4968,7 @@
           <p:cNvPr id="14" name="">
             <a:extLst xmlns:a="http://schemas.openxmlformats.org/drawingml/2006/main">
               <a:ext uri="{FF2B5EF4-FFF2-40B4-BE49-F238E27FC236}">
-                <a16:creationId xmlns:a16="http://schemas.microsoft.com/office/drawing/2014/main" id="{3850B795-3E90-481D-9A3B-644AD80349A9}"/>
+                <a16:creationId xmlns:a16="http://schemas.microsoft.com/office/drawing/2014/main" id="{265F95C9-9F24-4CD0-81E5-D8D67E10F4C2}"/>
               </a:ext>
             </a:extLst>
           </p:cNvPr>
@@ -5002,7 +5002,7 @@
           <p:cNvPr id="15" name="">
             <a:extLst xmlns:a="http://schemas.openxmlformats.org/drawingml/2006/main">
               <a:ext uri="{FF2B5EF4-FFF2-40B4-BE49-F238E27FC236}">
-                <a16:creationId xmlns:a16="http://schemas.microsoft.com/office/drawing/2014/main" id="{C8AE48BB-3CD5-4AD1-9910-BBA53B8037F2}"/>
+                <a16:creationId xmlns:a16="http://schemas.microsoft.com/office/drawing/2014/main" id="{246BCFF8-9829-4658-BCB2-F51F6DF2DB71}"/>
               </a:ext>
             </a:extLst>
           </p:cNvPr>
@@ -5034,7 +5034,7 @@
           <p:cNvPr id="16" name="">
             <a:extLst xmlns:a="http://schemas.openxmlformats.org/drawingml/2006/main">
               <a:ext uri="{FF2B5EF4-FFF2-40B4-BE49-F238E27FC236}">
-                <a16:creationId xmlns:a16="http://schemas.microsoft.com/office/drawing/2014/main" id="{990CF68D-820D-4654-9456-953E27F56E60}"/>
+                <a16:creationId xmlns:a16="http://schemas.microsoft.com/office/drawing/2014/main" id="{D2FD55A0-B844-4046-9E90-B1F5A19ECE88}"/>
               </a:ext>
             </a:extLst>
           </p:cNvPr>
@@ -5091,7 +5091,7 @@
           <p:cNvPr id="17" name="">
             <a:extLst xmlns:a="http://schemas.openxmlformats.org/drawingml/2006/main">
               <a:ext uri="{FF2B5EF4-FFF2-40B4-BE49-F238E27FC236}">
-                <a16:creationId xmlns:a16="http://schemas.microsoft.com/office/drawing/2014/main" id="{D0D85F09-FFFD-4323-80DD-D407246AF2A8}"/>
+                <a16:creationId xmlns:a16="http://schemas.microsoft.com/office/drawing/2014/main" id="{391F04DC-00F4-4815-862E-BFCBB177DC35}"/>
               </a:ext>
             </a:extLst>
           </p:cNvPr>
@@ -5148,7 +5148,7 @@
           <p:cNvPr id="18" name="">
             <a:extLst xmlns:a="http://schemas.openxmlformats.org/drawingml/2006/main">
               <a:ext uri="{FF2B5EF4-FFF2-40B4-BE49-F238E27FC236}">
-                <a16:creationId xmlns:a16="http://schemas.microsoft.com/office/drawing/2014/main" id="{4E29BFE1-D7AB-4B63-A971-D97990C39A06}"/>
+                <a16:creationId xmlns:a16="http://schemas.microsoft.com/office/drawing/2014/main" id="{29DD0DBF-6636-48E2-BDD2-0162B3A21A60}"/>
               </a:ext>
             </a:extLst>
           </p:cNvPr>
@@ -5182,7 +5182,7 @@
           <p:cNvPr id="19" name="">
             <a:extLst xmlns:a="http://schemas.openxmlformats.org/drawingml/2006/main">
               <a:ext uri="{FF2B5EF4-FFF2-40B4-BE49-F238E27FC236}">
-                <a16:creationId xmlns:a16="http://schemas.microsoft.com/office/drawing/2014/main" id="{AD8F2A46-1AD7-43B9-8715-85AEB29C40BC}"/>
+                <a16:creationId xmlns:a16="http://schemas.microsoft.com/office/drawing/2014/main" id="{AC2E2365-D45F-42EF-88AE-4DE32372465C}"/>
               </a:ext>
             </a:extLst>
           </p:cNvPr>
@@ -5214,7 +5214,7 @@
           <p:cNvPr id="20" name="">
             <a:extLst xmlns:a="http://schemas.openxmlformats.org/drawingml/2006/main">
               <a:ext uri="{FF2B5EF4-FFF2-40B4-BE49-F238E27FC236}">
-                <a16:creationId xmlns:a16="http://schemas.microsoft.com/office/drawing/2014/main" id="{55836F7B-9AE8-40A6-8385-13357D8CCF5E}"/>
+                <a16:creationId xmlns:a16="http://schemas.microsoft.com/office/drawing/2014/main" id="{A0174B73-F10B-4876-BD51-9FAADEBA9AFE}"/>
               </a:ext>
             </a:extLst>
           </p:cNvPr>
@@ -5271,7 +5271,7 @@
           <p:cNvPr id="21" name="">
             <a:extLst xmlns:a="http://schemas.openxmlformats.org/drawingml/2006/main">
               <a:ext uri="{FF2B5EF4-FFF2-40B4-BE49-F238E27FC236}">
-                <a16:creationId xmlns:a16="http://schemas.microsoft.com/office/drawing/2014/main" id="{044DC0F2-0DDF-4B43-9F6E-D821F6AB140C}"/>
+                <a16:creationId xmlns:a16="http://schemas.microsoft.com/office/drawing/2014/main" id="{8CFF8F6B-6284-41EE-A73B-91C3181C2702}"/>
               </a:ext>
             </a:extLst>
           </p:cNvPr>
@@ -5328,7 +5328,7 @@
           <p:cNvPr id="22" name="">
             <a:extLst xmlns:a="http://schemas.openxmlformats.org/drawingml/2006/main">
               <a:ext uri="{FF2B5EF4-FFF2-40B4-BE49-F238E27FC236}">
-                <a16:creationId xmlns:a16="http://schemas.microsoft.com/office/drawing/2014/main" id="{779E35AC-10EC-495A-97EC-3941508A9917}"/>
+                <a16:creationId xmlns:a16="http://schemas.microsoft.com/office/drawing/2014/main" id="{24C6286A-7D91-4E9C-BD81-1EB313B3BBDB}"/>
               </a:ext>
             </a:extLst>
           </p:cNvPr>
@@ -5383,7 +5383,7 @@
     </p:spTree>
     <p:extLst>
       <p:ext uri="{BB962C8B-B14F-4D97-AF65-F5344CB8AC3E}">
-        <p14:creationId xmlns:p14="http://schemas.microsoft.com/office/powerpoint/2010/main" val="25084306"/>
+        <p14:creationId xmlns:p14="http://schemas.microsoft.com/office/powerpoint/2010/main" val="920557828"/>
       </p:ext>
     </p:extLst>
   </p:cSld>
@@ -5584,7 +5584,7 @@
           <p:cNvPr id="23" name="">
             <a:extLst xmlns:a="http://schemas.openxmlformats.org/drawingml/2006/main">
               <a:ext uri="{FF2B5EF4-FFF2-40B4-BE49-F238E27FC236}">
-                <a16:creationId xmlns:a16="http://schemas.microsoft.com/office/drawing/2014/main" id="{4C8C2743-5BF5-4D58-AAFA-829BFF9AFC86}"/>
+                <a16:creationId xmlns:a16="http://schemas.microsoft.com/office/drawing/2014/main" id="{586492AB-628E-41F3-8954-CE2095D300BE}"/>
               </a:ext>
             </a:extLst>
           </p:cNvPr>
@@ -5616,7 +5616,7 @@
           <p:cNvPr id="2" name="">
             <a:extLst xmlns:a="http://schemas.openxmlformats.org/drawingml/2006/main">
               <a:ext uri="{FF2B5EF4-FFF2-40B4-BE49-F238E27FC236}">
-                <a16:creationId xmlns:a16="http://schemas.microsoft.com/office/drawing/2014/main" id="{8FBCE0A3-0A89-4FC7-A026-AC35526D08BB}"/>
+                <a16:creationId xmlns:a16="http://schemas.microsoft.com/office/drawing/2014/main" id="{ACC836BB-6BF9-469C-9B2E-3C16BBFA401D}"/>
               </a:ext>
             </a:extLst>
           </p:cNvPr>
@@ -5673,7 +5673,7 @@
           <p:cNvPr id="3" name="">
             <a:extLst xmlns:a="http://schemas.openxmlformats.org/drawingml/2006/main">
               <a:ext uri="{FF2B5EF4-FFF2-40B4-BE49-F238E27FC236}">
-                <a16:creationId xmlns:a16="http://schemas.microsoft.com/office/drawing/2014/main" id="{8392450A-0BA0-4114-91C8-2BB609F2D67A}"/>
+                <a16:creationId xmlns:a16="http://schemas.microsoft.com/office/drawing/2014/main" id="{ADE2B7CC-B560-4985-AAAE-9E2CDB8AC622}"/>
               </a:ext>
             </a:extLst>
           </p:cNvPr>
@@ -5705,7 +5705,7 @@
           <p:cNvPr id="4" name="">
             <a:extLst xmlns:a="http://schemas.openxmlformats.org/drawingml/2006/main">
               <a:ext uri="{FF2B5EF4-FFF2-40B4-BE49-F238E27FC236}">
-                <a16:creationId xmlns:a16="http://schemas.microsoft.com/office/drawing/2014/main" id="{65F7F2E5-254D-4753-B530-39661DC68ED3}"/>
+                <a16:creationId xmlns:a16="http://schemas.microsoft.com/office/drawing/2014/main" id="{55A6389B-0651-47A5-A9DC-121610E3030B}"/>
               </a:ext>
             </a:extLst>
           </p:cNvPr>
@@ -5762,7 +5762,7 @@
           <p:cNvPr id="5" name="">
             <a:extLst xmlns:a="http://schemas.openxmlformats.org/drawingml/2006/main">
               <a:ext uri="{FF2B5EF4-FFF2-40B4-BE49-F238E27FC236}">
-                <a16:creationId xmlns:a16="http://schemas.microsoft.com/office/drawing/2014/main" id="{527FDF0D-FF7F-4980-8308-C7AD12DF3375}"/>
+                <a16:creationId xmlns:a16="http://schemas.microsoft.com/office/drawing/2014/main" id="{E117A87E-601F-417D-8A15-B48E47BB288C}"/>
               </a:ext>
             </a:extLst>
           </p:cNvPr>
@@ -5819,7 +5819,7 @@
           <p:cNvPr id="6" name="">
             <a:extLst xmlns:a="http://schemas.openxmlformats.org/drawingml/2006/main">
               <a:ext uri="{FF2B5EF4-FFF2-40B4-BE49-F238E27FC236}">
-                <a16:creationId xmlns:a16="http://schemas.microsoft.com/office/drawing/2014/main" id="{44F7F461-3F94-4AC7-818C-D85AB605AAA6}"/>
+                <a16:creationId xmlns:a16="http://schemas.microsoft.com/office/drawing/2014/main" id="{BE7CE8F8-FF45-4C65-8A5B-EDCC381C4B77}"/>
               </a:ext>
             </a:extLst>
           </p:cNvPr>
@@ -5876,7 +5876,7 @@
           <p:cNvPr id="7" name="">
             <a:extLst xmlns:a="http://schemas.openxmlformats.org/drawingml/2006/main">
               <a:ext uri="{FF2B5EF4-FFF2-40B4-BE49-F238E27FC236}">
-                <a16:creationId xmlns:a16="http://schemas.microsoft.com/office/drawing/2014/main" id="{121FF7E4-73B7-40C8-B585-0A86DD6BF543}"/>
+                <a16:creationId xmlns:a16="http://schemas.microsoft.com/office/drawing/2014/main" id="{968756DC-348F-4249-A46D-69D5B97ADCAE}"/>
               </a:ext>
             </a:extLst>
           </p:cNvPr>
@@ -5908,7 +5908,7 @@
           <p:cNvPr id="8" name="">
             <a:extLst xmlns:a="http://schemas.openxmlformats.org/drawingml/2006/main">
               <a:ext uri="{FF2B5EF4-FFF2-40B4-BE49-F238E27FC236}">
-                <a16:creationId xmlns:a16="http://schemas.microsoft.com/office/drawing/2014/main" id="{0DAA0322-98F6-424B-8F4C-289312BBD652}"/>
+                <a16:creationId xmlns:a16="http://schemas.microsoft.com/office/drawing/2014/main" id="{74103E4F-FDB5-4722-96FB-FB3A8E8A10FD}"/>
               </a:ext>
             </a:extLst>
           </p:cNvPr>
@@ -5965,7 +5965,7 @@
           <p:cNvPr id="9" name="">
             <a:extLst xmlns:a="http://schemas.openxmlformats.org/drawingml/2006/main">
               <a:ext uri="{FF2B5EF4-FFF2-40B4-BE49-F238E27FC236}">
-                <a16:creationId xmlns:a16="http://schemas.microsoft.com/office/drawing/2014/main" id="{9933D42F-E32B-49E2-88BD-4222C2171DBE}"/>
+                <a16:creationId xmlns:a16="http://schemas.microsoft.com/office/drawing/2014/main" id="{CC04D4A4-0DC7-4CAC-9281-F7C8C86D7AAC}"/>
               </a:ext>
             </a:extLst>
           </p:cNvPr>
@@ -6022,7 +6022,7 @@
           <p:cNvPr id="10" name="">
             <a:extLst xmlns:a="http://schemas.openxmlformats.org/drawingml/2006/main">
               <a:ext uri="{FF2B5EF4-FFF2-40B4-BE49-F238E27FC236}">
-                <a16:creationId xmlns:a16="http://schemas.microsoft.com/office/drawing/2014/main" id="{15134B9C-63B7-4928-B109-1AD2AC7595DE}"/>
+                <a16:creationId xmlns:a16="http://schemas.microsoft.com/office/drawing/2014/main" id="{3E3C4772-CF82-4C7C-8C76-48CA58F39A8C}"/>
               </a:ext>
             </a:extLst>
           </p:cNvPr>
@@ -6056,7 +6056,7 @@
           <p:cNvPr id="11" name="">
             <a:extLst xmlns:a="http://schemas.openxmlformats.org/drawingml/2006/main">
               <a:ext uri="{FF2B5EF4-FFF2-40B4-BE49-F238E27FC236}">
-                <a16:creationId xmlns:a16="http://schemas.microsoft.com/office/drawing/2014/main" id="{CE7CA103-6393-4C47-9CBC-80F3D54BEECE}"/>
+                <a16:creationId xmlns:a16="http://schemas.microsoft.com/office/drawing/2014/main" id="{8BBB7DD4-5F2E-4A96-8AE1-32EBB0823721}"/>
               </a:ext>
             </a:extLst>
           </p:cNvPr>
@@ -6088,7 +6088,7 @@
           <p:cNvPr id="12" name="">
             <a:extLst xmlns:a="http://schemas.openxmlformats.org/drawingml/2006/main">
               <a:ext uri="{FF2B5EF4-FFF2-40B4-BE49-F238E27FC236}">
-                <a16:creationId xmlns:a16="http://schemas.microsoft.com/office/drawing/2014/main" id="{07ED7744-58F7-4DB7-9957-5432A0F9E5BF}"/>
+                <a16:creationId xmlns:a16="http://schemas.microsoft.com/office/drawing/2014/main" id="{26716004-8B6F-49C2-B9F8-7C546F18D1A0}"/>
               </a:ext>
             </a:extLst>
           </p:cNvPr>
@@ -6145,7 +6145,7 @@
           <p:cNvPr id="13" name="">
             <a:extLst xmlns:a="http://schemas.openxmlformats.org/drawingml/2006/main">
               <a:ext uri="{FF2B5EF4-FFF2-40B4-BE49-F238E27FC236}">
-                <a16:creationId xmlns:a16="http://schemas.microsoft.com/office/drawing/2014/main" id="{BA641974-CF7D-462F-842E-DFB26EEF385B}"/>
+                <a16:creationId xmlns:a16="http://schemas.microsoft.com/office/drawing/2014/main" id="{435BF847-9E8D-46BC-9FE6-7AD29D743125}"/>
               </a:ext>
             </a:extLst>
           </p:cNvPr>
@@ -6202,7 +6202,7 @@
           <p:cNvPr id="14" name="">
             <a:extLst xmlns:a="http://schemas.openxmlformats.org/drawingml/2006/main">
               <a:ext uri="{FF2B5EF4-FFF2-40B4-BE49-F238E27FC236}">
-                <a16:creationId xmlns:a16="http://schemas.microsoft.com/office/drawing/2014/main" id="{7E2D5487-3A7B-41F7-80FB-E702BF31C65B}"/>
+                <a16:creationId xmlns:a16="http://schemas.microsoft.com/office/drawing/2014/main" id="{9E6DF2BE-04EF-45B4-AB01-1FF73C9FA4FE}"/>
               </a:ext>
             </a:extLst>
           </p:cNvPr>
@@ -6236,7 +6236,7 @@
           <p:cNvPr id="15" name="">
             <a:extLst xmlns:a="http://schemas.openxmlformats.org/drawingml/2006/main">
               <a:ext uri="{FF2B5EF4-FFF2-40B4-BE49-F238E27FC236}">
-                <a16:creationId xmlns:a16="http://schemas.microsoft.com/office/drawing/2014/main" id="{8C23FC68-BF60-450C-B4E5-5411CB4C74E1}"/>
+                <a16:creationId xmlns:a16="http://schemas.microsoft.com/office/drawing/2014/main" id="{0855D860-E34D-40F2-B3C4-8F02294D95A5}"/>
               </a:ext>
             </a:extLst>
           </p:cNvPr>
@@ -6268,7 +6268,7 @@
           <p:cNvPr id="16" name="">
             <a:extLst xmlns:a="http://schemas.openxmlformats.org/drawingml/2006/main">
               <a:ext uri="{FF2B5EF4-FFF2-40B4-BE49-F238E27FC236}">
-                <a16:creationId xmlns:a16="http://schemas.microsoft.com/office/drawing/2014/main" id="{8946851D-1F75-4143-9397-8E54CF8FBDAA}"/>
+                <a16:creationId xmlns:a16="http://schemas.microsoft.com/office/drawing/2014/main" id="{05AF7CBE-D0A4-49F9-B4D3-69D5844A5D26}"/>
               </a:ext>
             </a:extLst>
           </p:cNvPr>
@@ -6325,7 +6325,7 @@
           <p:cNvPr id="17" name="">
             <a:extLst xmlns:a="http://schemas.openxmlformats.org/drawingml/2006/main">
               <a:ext uri="{FF2B5EF4-FFF2-40B4-BE49-F238E27FC236}">
-                <a16:creationId xmlns:a16="http://schemas.microsoft.com/office/drawing/2014/main" id="{1F0CB8FF-7381-4F14-9DEF-E0D6F6AA3D07}"/>
+                <a16:creationId xmlns:a16="http://schemas.microsoft.com/office/drawing/2014/main" id="{3038E610-1EEC-4789-9F5E-4BB018B02F6E}"/>
               </a:ext>
             </a:extLst>
           </p:cNvPr>
@@ -6382,7 +6382,7 @@
           <p:cNvPr id="18" name="">
             <a:extLst xmlns:a="http://schemas.openxmlformats.org/drawingml/2006/main">
               <a:ext uri="{FF2B5EF4-FFF2-40B4-BE49-F238E27FC236}">
-                <a16:creationId xmlns:a16="http://schemas.microsoft.com/office/drawing/2014/main" id="{E7D79F91-ABB4-4CB2-BEE4-EF8F5446D8C6}"/>
+                <a16:creationId xmlns:a16="http://schemas.microsoft.com/office/drawing/2014/main" id="{FE623D4D-19B1-4B9E-986A-D2444298ED4C}"/>
               </a:ext>
             </a:extLst>
           </p:cNvPr>
@@ -6416,7 +6416,7 @@
           <p:cNvPr id="19" name="">
             <a:extLst xmlns:a="http://schemas.openxmlformats.org/drawingml/2006/main">
               <a:ext uri="{FF2B5EF4-FFF2-40B4-BE49-F238E27FC236}">
-                <a16:creationId xmlns:a16="http://schemas.microsoft.com/office/drawing/2014/main" id="{B4F7B7A0-BF20-4C74-908C-7D1A595F28FB}"/>
+                <a16:creationId xmlns:a16="http://schemas.microsoft.com/office/drawing/2014/main" id="{BCD3C979-AC8C-4068-8BB0-E56BFA4521A2}"/>
               </a:ext>
             </a:extLst>
           </p:cNvPr>
@@ -6448,7 +6448,7 @@
           <p:cNvPr id="20" name="">
             <a:extLst xmlns:a="http://schemas.openxmlformats.org/drawingml/2006/main">
               <a:ext uri="{FF2B5EF4-FFF2-40B4-BE49-F238E27FC236}">
-                <a16:creationId xmlns:a16="http://schemas.microsoft.com/office/drawing/2014/main" id="{3AD2780B-840C-499D-9551-B9569925F996}"/>
+                <a16:creationId xmlns:a16="http://schemas.microsoft.com/office/drawing/2014/main" id="{BF0AB34F-30D1-4B92-89D1-A39CAF875745}"/>
               </a:ext>
             </a:extLst>
           </p:cNvPr>
@@ -6505,7 +6505,7 @@
           <p:cNvPr id="21" name="">
             <a:extLst xmlns:a="http://schemas.openxmlformats.org/drawingml/2006/main">
               <a:ext uri="{FF2B5EF4-FFF2-40B4-BE49-F238E27FC236}">
-                <a16:creationId xmlns:a16="http://schemas.microsoft.com/office/drawing/2014/main" id="{13A5A295-24AB-4C0E-A0FD-0A90734A598C}"/>
+                <a16:creationId xmlns:a16="http://schemas.microsoft.com/office/drawing/2014/main" id="{F709880D-2C6D-4952-AC5F-B1F28BFE05EC}"/>
               </a:ext>
             </a:extLst>
           </p:cNvPr>
@@ -6562,7 +6562,7 @@
           <p:cNvPr id="22" name="">
             <a:extLst xmlns:a="http://schemas.openxmlformats.org/drawingml/2006/main">
               <a:ext uri="{FF2B5EF4-FFF2-40B4-BE49-F238E27FC236}">
-                <a16:creationId xmlns:a16="http://schemas.microsoft.com/office/drawing/2014/main" id="{F6332AA9-4D73-4159-84D8-BC310D69E623}"/>
+                <a16:creationId xmlns:a16="http://schemas.microsoft.com/office/drawing/2014/main" id="{1CE5790B-9CF6-4B75-8985-A572B5906171}"/>
               </a:ext>
             </a:extLst>
           </p:cNvPr>
@@ -6617,7 +6617,7 @@
     </p:spTree>
     <p:extLst>
       <p:ext uri="{BB962C8B-B14F-4D97-AF65-F5344CB8AC3E}">
-        <p14:creationId xmlns:p14="http://schemas.microsoft.com/office/powerpoint/2010/main" val="1258705602"/>
+        <p14:creationId xmlns:p14="http://schemas.microsoft.com/office/powerpoint/2010/main" val="887864558"/>
       </p:ext>
     </p:extLst>
   </p:cSld>
@@ -6818,7 +6818,7 @@
           <p:cNvPr id="16" name="">
             <a:extLst xmlns:a="http://schemas.openxmlformats.org/drawingml/2006/main">
               <a:ext uri="{FF2B5EF4-FFF2-40B4-BE49-F238E27FC236}">
-                <a16:creationId xmlns:a16="http://schemas.microsoft.com/office/drawing/2014/main" id="{6F93F9EE-7FB8-44B2-A5CE-A0572861253B}"/>
+                <a16:creationId xmlns:a16="http://schemas.microsoft.com/office/drawing/2014/main" id="{DA236B91-C7AE-4780-88C3-1F6A8B65EFC9}"/>
               </a:ext>
             </a:extLst>
           </p:cNvPr>
@@ -6850,7 +6850,7 @@
           <p:cNvPr id="2" name="">
             <a:extLst xmlns:a="http://schemas.openxmlformats.org/drawingml/2006/main">
               <a:ext uri="{FF2B5EF4-FFF2-40B4-BE49-F238E27FC236}">
-                <a16:creationId xmlns:a16="http://schemas.microsoft.com/office/drawing/2014/main" id="{5223B672-AADD-49CA-91C3-E7863D208BB7}"/>
+                <a16:creationId xmlns:a16="http://schemas.microsoft.com/office/drawing/2014/main" id="{60C026C3-A643-404E-85DF-19540BEA0703}"/>
               </a:ext>
             </a:extLst>
           </p:cNvPr>
@@ -6907,7 +6907,7 @@
           <p:cNvPr id="3" name="">
             <a:extLst xmlns:a="http://schemas.openxmlformats.org/drawingml/2006/main">
               <a:ext uri="{FF2B5EF4-FFF2-40B4-BE49-F238E27FC236}">
-                <a16:creationId xmlns:a16="http://schemas.microsoft.com/office/drawing/2014/main" id="{4C906C8A-7E4B-4D02-822E-6BEB405107EA}"/>
+                <a16:creationId xmlns:a16="http://schemas.microsoft.com/office/drawing/2014/main" id="{89991606-1B68-4F40-AFB7-31F86B6C4D84}"/>
               </a:ext>
             </a:extLst>
           </p:cNvPr>
@@ -6939,7 +6939,7 @@
           <p:cNvPr id="4" name="">
             <a:extLst xmlns:a="http://schemas.openxmlformats.org/drawingml/2006/main">
               <a:ext uri="{FF2B5EF4-FFF2-40B4-BE49-F238E27FC236}">
-                <a16:creationId xmlns:a16="http://schemas.microsoft.com/office/drawing/2014/main" id="{DCDB197B-4A85-461E-9D5D-A3C3D9E9EB4D}"/>
+                <a16:creationId xmlns:a16="http://schemas.microsoft.com/office/drawing/2014/main" id="{487631D4-A72A-40A9-942C-98BC8BDFCEE3}"/>
               </a:ext>
             </a:extLst>
           </p:cNvPr>
@@ -6996,7 +6996,7 @@
           <p:cNvPr id="5" name="">
             <a:extLst xmlns:a="http://schemas.openxmlformats.org/drawingml/2006/main">
               <a:ext uri="{FF2B5EF4-FFF2-40B4-BE49-F238E27FC236}">
-                <a16:creationId xmlns:a16="http://schemas.microsoft.com/office/drawing/2014/main" id="{0E346BE8-A42E-4813-8740-F1C2A91C791A}"/>
+                <a16:creationId xmlns:a16="http://schemas.microsoft.com/office/drawing/2014/main" id="{834BEB36-D435-49CD-BBD5-4D581661D1F4}"/>
               </a:ext>
             </a:extLst>
           </p:cNvPr>
@@ -7053,7 +7053,7 @@
           <p:cNvPr id="6" name="">
             <a:extLst xmlns:a="http://schemas.openxmlformats.org/drawingml/2006/main">
               <a:ext uri="{FF2B5EF4-FFF2-40B4-BE49-F238E27FC236}">
-                <a16:creationId xmlns:a16="http://schemas.microsoft.com/office/drawing/2014/main" id="{FBBB0C9A-368E-4156-B857-9277F059EF89}"/>
+                <a16:creationId xmlns:a16="http://schemas.microsoft.com/office/drawing/2014/main" id="{C551A15E-E71D-4628-B9DB-29F0F8A2D29E}"/>
               </a:ext>
             </a:extLst>
           </p:cNvPr>
@@ -7110,7 +7110,7 @@
           <p:cNvPr id="7" name="">
             <a:extLst xmlns:a="http://schemas.openxmlformats.org/drawingml/2006/main">
               <a:ext uri="{FF2B5EF4-FFF2-40B4-BE49-F238E27FC236}">
-                <a16:creationId xmlns:a16="http://schemas.microsoft.com/office/drawing/2014/main" id="{EB40037C-7226-4766-AA52-00757BC6B450}"/>
+                <a16:creationId xmlns:a16="http://schemas.microsoft.com/office/drawing/2014/main" id="{C03534E3-8E5F-4084-8E97-D54FF16FF0D9}"/>
               </a:ext>
             </a:extLst>
           </p:cNvPr>
@@ -7142,7 +7142,7 @@
           <p:cNvPr id="8" name="">
             <a:extLst xmlns:a="http://schemas.openxmlformats.org/drawingml/2006/main">
               <a:ext uri="{FF2B5EF4-FFF2-40B4-BE49-F238E27FC236}">
-                <a16:creationId xmlns:a16="http://schemas.microsoft.com/office/drawing/2014/main" id="{C3F92107-32E4-4B2D-BC80-8B05D1BBB5E2}"/>
+                <a16:creationId xmlns:a16="http://schemas.microsoft.com/office/drawing/2014/main" id="{E39837E8-2C0A-43C9-8E1D-2127F44AB3A1}"/>
               </a:ext>
             </a:extLst>
           </p:cNvPr>
@@ -7199,7 +7199,7 @@
           <p:cNvPr id="9" name="">
             <a:extLst xmlns:a="http://schemas.openxmlformats.org/drawingml/2006/main">
               <a:ext uri="{FF2B5EF4-FFF2-40B4-BE49-F238E27FC236}">
-                <a16:creationId xmlns:a16="http://schemas.microsoft.com/office/drawing/2014/main" id="{AA227CC9-0F7F-45E0-9E5C-5F7FC79E93A9}"/>
+                <a16:creationId xmlns:a16="http://schemas.microsoft.com/office/drawing/2014/main" id="{B35AA6F5-F36E-4F07-9F0C-EA7B20F69A04}"/>
               </a:ext>
             </a:extLst>
           </p:cNvPr>
@@ -7256,7 +7256,7 @@
           <p:cNvPr id="10" name="">
             <a:extLst xmlns:a="http://schemas.openxmlformats.org/drawingml/2006/main">
               <a:ext uri="{FF2B5EF4-FFF2-40B4-BE49-F238E27FC236}">
-                <a16:creationId xmlns:a16="http://schemas.microsoft.com/office/drawing/2014/main" id="{0C4874F0-133F-44F4-BED6-4FB8192E3334}"/>
+                <a16:creationId xmlns:a16="http://schemas.microsoft.com/office/drawing/2014/main" id="{8DA24F38-9ED6-4519-A330-5C4BEC087277}"/>
               </a:ext>
             </a:extLst>
           </p:cNvPr>
@@ -7313,7 +7313,7 @@
           <p:cNvPr id="11" name="">
             <a:extLst xmlns:a="http://schemas.openxmlformats.org/drawingml/2006/main">
               <a:ext uri="{FF2B5EF4-FFF2-40B4-BE49-F238E27FC236}">
-                <a16:creationId xmlns:a16="http://schemas.microsoft.com/office/drawing/2014/main" id="{03CD1AD9-CD1B-455A-9DCD-326B8052BA2D}"/>
+                <a16:creationId xmlns:a16="http://schemas.microsoft.com/office/drawing/2014/main" id="{917FF7C1-33EB-45C0-8094-FB3BE86414CE}"/>
               </a:ext>
             </a:extLst>
           </p:cNvPr>
@@ -7345,7 +7345,7 @@
           <p:cNvPr id="12" name="">
             <a:extLst xmlns:a="http://schemas.openxmlformats.org/drawingml/2006/main">
               <a:ext uri="{FF2B5EF4-FFF2-40B4-BE49-F238E27FC236}">
-                <a16:creationId xmlns:a16="http://schemas.microsoft.com/office/drawing/2014/main" id="{73626CF7-A770-4AE3-ABC1-2231600F6CEF}"/>
+                <a16:creationId xmlns:a16="http://schemas.microsoft.com/office/drawing/2014/main" id="{5C6C709B-5E42-4B5B-B694-38E4A926C4FC}"/>
               </a:ext>
             </a:extLst>
           </p:cNvPr>
@@ -7402,7 +7402,7 @@
           <p:cNvPr id="13" name="">
             <a:extLst xmlns:a="http://schemas.openxmlformats.org/drawingml/2006/main">
               <a:ext uri="{FF2B5EF4-FFF2-40B4-BE49-F238E27FC236}">
-                <a16:creationId xmlns:a16="http://schemas.microsoft.com/office/drawing/2014/main" id="{CDBC9AD5-592A-44EF-B7FB-D80C3A17F4FB}"/>
+                <a16:creationId xmlns:a16="http://schemas.microsoft.com/office/drawing/2014/main" id="{5A322897-FC94-4CC7-8EBC-75BA0826D068}"/>
               </a:ext>
             </a:extLst>
           </p:cNvPr>
@@ -7459,7 +7459,7 @@
           <p:cNvPr id="14" name="">
             <a:extLst xmlns:a="http://schemas.openxmlformats.org/drawingml/2006/main">
               <a:ext uri="{FF2B5EF4-FFF2-40B4-BE49-F238E27FC236}">
-                <a16:creationId xmlns:a16="http://schemas.microsoft.com/office/drawing/2014/main" id="{FBF5CC3E-3873-4793-B4C8-A605BD8C97D9}"/>
+                <a16:creationId xmlns:a16="http://schemas.microsoft.com/office/drawing/2014/main" id="{66724052-2663-4058-912A-A29925443D8B}"/>
               </a:ext>
             </a:extLst>
           </p:cNvPr>
@@ -7516,7 +7516,7 @@
           <p:cNvPr id="15" name="">
             <a:extLst xmlns:a="http://schemas.openxmlformats.org/drawingml/2006/main">
               <a:ext uri="{FF2B5EF4-FFF2-40B4-BE49-F238E27FC236}">
-                <a16:creationId xmlns:a16="http://schemas.microsoft.com/office/drawing/2014/main" id="{565BF970-28DB-44A9-B209-37FF840B6319}"/>
+                <a16:creationId xmlns:a16="http://schemas.microsoft.com/office/drawing/2014/main" id="{AB74DAD2-3532-4323-8AE0-7C35A5B9E130}"/>
               </a:ext>
             </a:extLst>
           </p:cNvPr>
@@ -7571,7 +7571,7 @@
     </p:spTree>
     <p:extLst>
       <p:ext uri="{BB962C8B-B14F-4D97-AF65-F5344CB8AC3E}">
-        <p14:creationId xmlns:p14="http://schemas.microsoft.com/office/powerpoint/2010/main" val="1333242675"/>
+        <p14:creationId xmlns:p14="http://schemas.microsoft.com/office/powerpoint/2010/main" val="1672719266"/>
       </p:ext>
     </p:extLst>
   </p:cSld>
@@ -7769,10 +7769,10 @@
       </p:grpSpPr>
       <p:sp>
         <p:nvSpPr>
-          <p:cNvPr id="23" name="">
-            <a:extLst xmlns:a="http://schemas.openxmlformats.org/drawingml/2006/main">
-              <a:ext uri="{FF2B5EF4-FFF2-40B4-BE49-F238E27FC236}">
-                <a16:creationId xmlns:a16="http://schemas.microsoft.com/office/drawing/2014/main" id="{8B0D5CFD-E38F-420D-8366-D907E311F10C}"/>
+          <p:cNvPr id="26" name="">
+            <a:extLst xmlns:a="http://schemas.openxmlformats.org/drawingml/2006/main">
+              <a:ext uri="{FF2B5EF4-FFF2-40B4-BE49-F238E27FC236}">
+                <a16:creationId xmlns:a16="http://schemas.microsoft.com/office/drawing/2014/main" id="{7D708DD4-BE67-45C8-B024-5DC84BAB7DB3}"/>
               </a:ext>
             </a:extLst>
           </p:cNvPr>
@@ -7804,7 +7804,7 @@
           <p:cNvPr id="2" name="">
             <a:extLst xmlns:a="http://schemas.openxmlformats.org/drawingml/2006/main">
               <a:ext uri="{FF2B5EF4-FFF2-40B4-BE49-F238E27FC236}">
-                <a16:creationId xmlns:a16="http://schemas.microsoft.com/office/drawing/2014/main" id="{C0C22454-253F-47B8-830C-A0E512BE595C}"/>
+                <a16:creationId xmlns:a16="http://schemas.microsoft.com/office/drawing/2014/main" id="{1676C0CB-F000-4524-B21A-DC00E6E80D5E}"/>
               </a:ext>
             </a:extLst>
           </p:cNvPr>
@@ -7861,7 +7861,7 @@
           <p:cNvPr id="3" name="">
             <a:extLst xmlns:a="http://schemas.openxmlformats.org/drawingml/2006/main">
               <a:ext uri="{FF2B5EF4-FFF2-40B4-BE49-F238E27FC236}">
-                <a16:creationId xmlns:a16="http://schemas.microsoft.com/office/drawing/2014/main" id="{97AC5A90-AECE-4BDD-AB93-DA5B6395CF2D}"/>
+                <a16:creationId xmlns:a16="http://schemas.microsoft.com/office/drawing/2014/main" id="{568979B7-F7DD-4729-8A69-A55DB731C18E}"/>
               </a:ext>
             </a:extLst>
           </p:cNvPr>
@@ -7893,7 +7893,7 @@
           <p:cNvPr id="4" name="">
             <a:extLst xmlns:a="http://schemas.openxmlformats.org/drawingml/2006/main">
               <a:ext uri="{FF2B5EF4-FFF2-40B4-BE49-F238E27FC236}">
-                <a16:creationId xmlns:a16="http://schemas.microsoft.com/office/drawing/2014/main" id="{12E78154-8FF7-4435-A1E9-328B2D2FDC57}"/>
+                <a16:creationId xmlns:a16="http://schemas.microsoft.com/office/drawing/2014/main" id="{54D4B34E-413A-4727-AD13-A96897B9A350}"/>
               </a:ext>
             </a:extLst>
           </p:cNvPr>
@@ -7950,7 +7950,7 @@
           <p:cNvPr id="5" name="">
             <a:extLst xmlns:a="http://schemas.openxmlformats.org/drawingml/2006/main">
               <a:ext uri="{FF2B5EF4-FFF2-40B4-BE49-F238E27FC236}">
-                <a16:creationId xmlns:a16="http://schemas.microsoft.com/office/drawing/2014/main" id="{953F6B09-FB1F-4338-B611-286B43348309}"/>
+                <a16:creationId xmlns:a16="http://schemas.microsoft.com/office/drawing/2014/main" id="{750B4D9B-ADAC-4186-99D4-444AD79A966B}"/>
               </a:ext>
             </a:extLst>
           </p:cNvPr>
@@ -8007,7 +8007,7 @@
           <p:cNvPr id="6" name="">
             <a:extLst xmlns:a="http://schemas.openxmlformats.org/drawingml/2006/main">
               <a:ext uri="{FF2B5EF4-FFF2-40B4-BE49-F238E27FC236}">
-                <a16:creationId xmlns:a16="http://schemas.microsoft.com/office/drawing/2014/main" id="{EC7489BA-2E74-4D01-905E-D8C21DD4EA56}"/>
+                <a16:creationId xmlns:a16="http://schemas.microsoft.com/office/drawing/2014/main" id="{322D565E-0AE1-478F-9CFB-7C71B37C973C}"/>
               </a:ext>
             </a:extLst>
           </p:cNvPr>
@@ -8064,7 +8064,7 @@
           <p:cNvPr id="7" name="">
             <a:extLst xmlns:a="http://schemas.openxmlformats.org/drawingml/2006/main">
               <a:ext uri="{FF2B5EF4-FFF2-40B4-BE49-F238E27FC236}">
-                <a16:creationId xmlns:a16="http://schemas.microsoft.com/office/drawing/2014/main" id="{D60EE3F6-02C4-4418-A4F4-8DF8DACDD613}"/>
+                <a16:creationId xmlns:a16="http://schemas.microsoft.com/office/drawing/2014/main" id="{69E1B3F1-5E0B-4FDF-ADD2-E76A63A9F61A}"/>
               </a:ext>
             </a:extLst>
           </p:cNvPr>
@@ -8096,7 +8096,7 @@
           <p:cNvPr id="8" name="">
             <a:extLst xmlns:a="http://schemas.openxmlformats.org/drawingml/2006/main">
               <a:ext uri="{FF2B5EF4-FFF2-40B4-BE49-F238E27FC236}">
-                <a16:creationId xmlns:a16="http://schemas.microsoft.com/office/drawing/2014/main" id="{6A362D2C-FE43-4C63-94D7-62C2D1390B35}"/>
+                <a16:creationId xmlns:a16="http://schemas.microsoft.com/office/drawing/2014/main" id="{0A52B968-3EEB-4087-8572-F3E9F6A15C60}"/>
               </a:ext>
             </a:extLst>
           </p:cNvPr>
@@ -8153,7 +8153,7 @@
           <p:cNvPr id="9" name="">
             <a:extLst xmlns:a="http://schemas.openxmlformats.org/drawingml/2006/main">
               <a:ext uri="{FF2B5EF4-FFF2-40B4-BE49-F238E27FC236}">
-                <a16:creationId xmlns:a16="http://schemas.microsoft.com/office/drawing/2014/main" id="{4CE4F46D-C2E8-43FA-8FF3-EC10DE581B85}"/>
+                <a16:creationId xmlns:a16="http://schemas.microsoft.com/office/drawing/2014/main" id="{233BACF3-0D83-4B89-B208-8D7A15F3F715}"/>
               </a:ext>
             </a:extLst>
           </p:cNvPr>
@@ -8210,19 +8210,19 @@
           <p:cNvPr id="10" name="">
             <a:extLst xmlns:a="http://schemas.openxmlformats.org/drawingml/2006/main">
               <a:ext uri="{FF2B5EF4-FFF2-40B4-BE49-F238E27FC236}">
-                <a16:creationId xmlns:a16="http://schemas.microsoft.com/office/drawing/2014/main" id="{02AE72C2-B246-4761-B794-3A6BDD744B12}"/>
-              </a:ext>
-            </a:extLst>
-          </p:cNvPr>
-          <p:cNvSpPr>
-            <a:spLocks xmlns:a="http://schemas.openxmlformats.org/drawingml/2006/main" noGrp="1"/>
-          </p:cNvSpPr>
-          <p:nvPr/>
-        </p:nvSpPr>
-        <p:spPr>
-          <a:xfrm xmlns:a="http://schemas.openxmlformats.org/drawingml/2006/main">
-            <a:off x="914400" y="1257300"/>
-            <a:ext cx="10363200" cy="781050"/>
+                <a16:creationId xmlns:a16="http://schemas.microsoft.com/office/drawing/2014/main" id="{DDC0A1B4-EE34-4698-AE39-B2A318520625}"/>
+              </a:ext>
+            </a:extLst>
+          </p:cNvPr>
+          <p:cNvSpPr>
+            <a:spLocks xmlns:a="http://schemas.openxmlformats.org/drawingml/2006/main" noGrp="1"/>
+          </p:cNvSpPr>
+          <p:nvPr/>
+        </p:nvSpPr>
+        <p:spPr>
+          <a:xfrm xmlns:a="http://schemas.openxmlformats.org/drawingml/2006/main">
+            <a:off x="857250" y="1219200"/>
+            <a:ext cx="10477500" cy="742950"/>
           </a:xfrm>
           <a:prstGeom xmlns:a="http://schemas.openxmlformats.org/drawingml/2006/main" prst="rect">
             <a:avLst/>
@@ -8239,7 +8239,7 @@
           <a:lstStyle xmlns:a="http://schemas.openxmlformats.org/drawingml/2006/main"/>
           <a:p xmlns:a="http://schemas.openxmlformats.org/drawingml/2006/main">
             <a:pPr algn="ctr">
-              <a:defRPr sz="2175" b="1">
+              <a:defRPr sz="2100" b="1">
                 <a:solidFill>
                   <a:srgbClr val="17253A"/>
                 </a:solidFill>
@@ -8249,7 +8249,7 @@
               </a:defRPr>
             </a:pPr>
             <a:r>
-              <a:rPr sz="2175" b="1">
+              <a:rPr sz="2100" b="1">
                 <a:solidFill>
                   <a:srgbClr val="17253A"/>
                 </a:solidFill>
@@ -8267,28 +8267,30 @@
           <p:cNvPr id="11" name="">
             <a:extLst xmlns:a="http://schemas.openxmlformats.org/drawingml/2006/main">
               <a:ext uri="{FF2B5EF4-FFF2-40B4-BE49-F238E27FC236}">
-                <a16:creationId xmlns:a16="http://schemas.microsoft.com/office/drawing/2014/main" id="{102E76D7-D7B7-4AA3-AD6D-10B343433E01}"/>
-              </a:ext>
-            </a:extLst>
-          </p:cNvPr>
-          <p:cNvSpPr>
-            <a:spLocks xmlns:a="http://schemas.openxmlformats.org/drawingml/2006/main" noGrp="1"/>
-          </p:cNvSpPr>
-          <p:nvPr/>
-        </p:nvSpPr>
-        <p:spPr>
-          <a:xfrm xmlns:a="http://schemas.openxmlformats.org/drawingml/2006/main">
-            <a:off x="1000125" y="2247900"/>
-            <a:ext cx="476250" cy="476250"/>
-          </a:xfrm>
-          <a:prstGeom xmlns:a="http://schemas.openxmlformats.org/drawingml/2006/main" prst="ellipse">
+                <a16:creationId xmlns:a16="http://schemas.microsoft.com/office/drawing/2014/main" id="{99052FEE-5B3E-4F62-A433-1B92C29DDA02}"/>
+              </a:ext>
+            </a:extLst>
+          </p:cNvPr>
+          <p:cNvSpPr>
+            <a:spLocks xmlns:a="http://schemas.openxmlformats.org/drawingml/2006/main" noGrp="1"/>
+          </p:cNvSpPr>
+          <p:nvPr/>
+        </p:nvSpPr>
+        <p:spPr>
+          <a:xfrm xmlns:a="http://schemas.openxmlformats.org/drawingml/2006/main">
+            <a:off x="971550" y="2124075"/>
+            <a:ext cx="38100" cy="3524250"/>
+          </a:xfrm>
+          <a:prstGeom xmlns:a="http://schemas.openxmlformats.org/drawingml/2006/main" prst="rect">
             <a:avLst/>
           </a:prstGeom>
           <a:solidFill xmlns:a="http://schemas.openxmlformats.org/drawingml/2006/main">
-            <a:srgbClr val="18324A"/>
+            <a:srgbClr val="2C6E73"/>
           </a:solidFill>
           <a:ln xmlns:a="http://schemas.openxmlformats.org/drawingml/2006/main" w="0">
-            <a:noFill/>
+            <a:solidFill>
+              <a:srgbClr val="2C6E73"/>
+            </a:solidFill>
           </a:ln>
         </p:spPr>
       </p:sp>
@@ -8297,19 +8299,19 @@
           <p:cNvPr id="12" name="">
             <a:extLst xmlns:a="http://schemas.openxmlformats.org/drawingml/2006/main">
               <a:ext uri="{FF2B5EF4-FFF2-40B4-BE49-F238E27FC236}">
-                <a16:creationId xmlns:a16="http://schemas.microsoft.com/office/drawing/2014/main" id="{D1E156E0-8452-4B34-8E65-C0690CDC0456}"/>
-              </a:ext>
-            </a:extLst>
-          </p:cNvPr>
-          <p:cNvSpPr>
-            <a:spLocks xmlns:a="http://schemas.openxmlformats.org/drawingml/2006/main" noGrp="1"/>
-          </p:cNvSpPr>
-          <p:nvPr/>
-        </p:nvSpPr>
-        <p:spPr>
-          <a:xfrm xmlns:a="http://schemas.openxmlformats.org/drawingml/2006/main">
-            <a:off x="1000125" y="2276475"/>
-            <a:ext cx="476250" cy="419100"/>
+                <a16:creationId xmlns:a16="http://schemas.microsoft.com/office/drawing/2014/main" id="{0ED3E713-C163-454E-9E13-21FBB26F93A1}"/>
+              </a:ext>
+            </a:extLst>
+          </p:cNvPr>
+          <p:cNvSpPr>
+            <a:spLocks xmlns:a="http://schemas.openxmlformats.org/drawingml/2006/main" noGrp="1"/>
+          </p:cNvSpPr>
+          <p:nvPr/>
+        </p:nvSpPr>
+        <p:spPr>
+          <a:xfrm xmlns:a="http://schemas.openxmlformats.org/drawingml/2006/main">
+            <a:off x="1162050" y="2200275"/>
+            <a:ext cx="400050" cy="400050"/>
           </a:xfrm>
           <a:prstGeom xmlns:a="http://schemas.openxmlformats.org/drawingml/2006/main" prst="rect">
             <a:avLst/>
@@ -8326,9 +8328,9 @@
           <a:lstStyle xmlns:a="http://schemas.openxmlformats.org/drawingml/2006/main"/>
           <a:p xmlns:a="http://schemas.openxmlformats.org/drawingml/2006/main">
             <a:pPr algn="ctr">
-              <a:defRPr sz="1350" b="1">
-                <a:solidFill>
-                  <a:srgbClr val="FFFFFF"/>
+              <a:defRPr sz="1125" b="1">
+                <a:solidFill>
+                  <a:srgbClr val="2C6E73"/>
                 </a:solidFill>
                 <a:latin typeface="Arial"/>
                 <a:ea typeface="Arial"/>
@@ -8336,9 +8338,9 @@
               </a:defRPr>
             </a:pPr>
             <a:r>
-              <a:rPr sz="1350" b="1">
-                <a:solidFill>
-                  <a:srgbClr val="FFFFFF"/>
+              <a:rPr sz="1125" b="1">
+                <a:solidFill>
+                  <a:srgbClr val="2C6E73"/>
                 </a:solidFill>
                 <a:latin typeface="Arial"/>
                 <a:ea typeface="Arial"/>
@@ -8354,19 +8356,19 @@
           <p:cNvPr id="13" name="">
             <a:extLst xmlns:a="http://schemas.openxmlformats.org/drawingml/2006/main">
               <a:ext uri="{FF2B5EF4-FFF2-40B4-BE49-F238E27FC236}">
-                <a16:creationId xmlns:a16="http://schemas.microsoft.com/office/drawing/2014/main" id="{69708F94-665D-4FDA-A1B0-8999ED740CCC}"/>
-              </a:ext>
-            </a:extLst>
-          </p:cNvPr>
-          <p:cNvSpPr>
-            <a:spLocks xmlns:a="http://schemas.openxmlformats.org/drawingml/2006/main" noGrp="1"/>
-          </p:cNvSpPr>
-          <p:nvPr/>
-        </p:nvSpPr>
-        <p:spPr>
-          <a:xfrm xmlns:a="http://schemas.openxmlformats.org/drawingml/2006/main">
-            <a:off x="1714500" y="2181225"/>
-            <a:ext cx="9429750" cy="609600"/>
+                <a16:creationId xmlns:a16="http://schemas.microsoft.com/office/drawing/2014/main" id="{2FDFC7FA-1979-42CA-AD12-74FE76F1E4F6}"/>
+              </a:ext>
+            </a:extLst>
+          </p:cNvPr>
+          <p:cNvSpPr>
+            <a:spLocks xmlns:a="http://schemas.openxmlformats.org/drawingml/2006/main" noGrp="1"/>
+          </p:cNvSpPr>
+          <p:nvPr/>
+        </p:nvSpPr>
+        <p:spPr>
+          <a:xfrm xmlns:a="http://schemas.openxmlformats.org/drawingml/2006/main">
+            <a:off x="1714500" y="2114550"/>
+            <a:ext cx="9525000" cy="638175"/>
           </a:xfrm>
           <a:prstGeom xmlns:a="http://schemas.openxmlformats.org/drawingml/2006/main" prst="rect">
             <a:avLst/>
@@ -8383,7 +8385,7 @@
           <a:lstStyle xmlns:a="http://schemas.openxmlformats.org/drawingml/2006/main"/>
           <a:p xmlns:a="http://schemas.openxmlformats.org/drawingml/2006/main">
             <a:pPr algn="l">
-              <a:defRPr sz="1500" b="0">
+              <a:defRPr sz="1575" b="0">
                 <a:solidFill>
                   <a:srgbClr val="17253A"/>
                 </a:solidFill>
@@ -8393,7 +8395,7 @@
               </a:defRPr>
             </a:pPr>
             <a:r>
-              <a:rPr sz="1500" b="0">
+              <a:rPr sz="1575" b="0">
                 <a:solidFill>
                   <a:srgbClr val="17253A"/>
                 </a:solidFill>
@@ -8401,7 +8403,7 @@
                 <a:ea typeface="Arial"/>
                 <a:cs typeface="Arial"/>
               </a:rPr>
-              <a:t>Identify the structure: Identify what changes and what stays constant.</a:t>
+              <a:t>7, 12, 17, 22</a:t>
             </a:r>
           </a:p>
         </p:txBody>
@@ -8411,28 +8413,30 @@
           <p:cNvPr id="14" name="">
             <a:extLst xmlns:a="http://schemas.openxmlformats.org/drawingml/2006/main">
               <a:ext uri="{FF2B5EF4-FFF2-40B4-BE49-F238E27FC236}">
-                <a16:creationId xmlns:a16="http://schemas.microsoft.com/office/drawing/2014/main" id="{1FF4DA1F-BE85-404E-87B8-8431D212F9D4}"/>
-              </a:ext>
-            </a:extLst>
-          </p:cNvPr>
-          <p:cNvSpPr>
-            <a:spLocks xmlns:a="http://schemas.openxmlformats.org/drawingml/2006/main" noGrp="1"/>
-          </p:cNvSpPr>
-          <p:nvPr/>
-        </p:nvSpPr>
-        <p:spPr>
-          <a:xfrm xmlns:a="http://schemas.openxmlformats.org/drawingml/2006/main">
-            <a:off x="1000125" y="2990850"/>
-            <a:ext cx="476250" cy="476250"/>
-          </a:xfrm>
-          <a:prstGeom xmlns:a="http://schemas.openxmlformats.org/drawingml/2006/main" prst="ellipse">
+                <a16:creationId xmlns:a16="http://schemas.microsoft.com/office/drawing/2014/main" id="{1A21B214-AC70-4CB5-9DD3-D1A7A272221C}"/>
+              </a:ext>
+            </a:extLst>
+          </p:cNvPr>
+          <p:cNvSpPr>
+            <a:spLocks xmlns:a="http://schemas.openxmlformats.org/drawingml/2006/main" noGrp="1"/>
+          </p:cNvSpPr>
+          <p:nvPr/>
+        </p:nvSpPr>
+        <p:spPr>
+          <a:xfrm xmlns:a="http://schemas.openxmlformats.org/drawingml/2006/main">
+            <a:off x="1714500" y="2771775"/>
+            <a:ext cx="9334500" cy="9525"/>
+          </a:xfrm>
+          <a:prstGeom xmlns:a="http://schemas.openxmlformats.org/drawingml/2006/main" prst="rect">
             <a:avLst/>
           </a:prstGeom>
           <a:solidFill xmlns:a="http://schemas.openxmlformats.org/drawingml/2006/main">
-            <a:srgbClr val="2C6E73"/>
+            <a:srgbClr val="D9E0E6"/>
           </a:solidFill>
           <a:ln xmlns:a="http://schemas.openxmlformats.org/drawingml/2006/main" w="0">
-            <a:noFill/>
+            <a:solidFill>
+              <a:srgbClr val="D9E0E6"/>
+            </a:solidFill>
           </a:ln>
         </p:spPr>
       </p:sp>
@@ -8441,19 +8445,19 @@
           <p:cNvPr id="15" name="">
             <a:extLst xmlns:a="http://schemas.openxmlformats.org/drawingml/2006/main">
               <a:ext uri="{FF2B5EF4-FFF2-40B4-BE49-F238E27FC236}">
-                <a16:creationId xmlns:a16="http://schemas.microsoft.com/office/drawing/2014/main" id="{E69885D4-70DB-4F5F-8F7B-21A08F431E0C}"/>
-              </a:ext>
-            </a:extLst>
-          </p:cNvPr>
-          <p:cNvSpPr>
-            <a:spLocks xmlns:a="http://schemas.openxmlformats.org/drawingml/2006/main" noGrp="1"/>
-          </p:cNvSpPr>
-          <p:nvPr/>
-        </p:nvSpPr>
-        <p:spPr>
-          <a:xfrm xmlns:a="http://schemas.openxmlformats.org/drawingml/2006/main">
-            <a:off x="1000125" y="3019425"/>
-            <a:ext cx="476250" cy="419100"/>
+                <a16:creationId xmlns:a16="http://schemas.microsoft.com/office/drawing/2014/main" id="{B696E14E-0615-4EC4-A950-59D68D4F289B}"/>
+              </a:ext>
+            </a:extLst>
+          </p:cNvPr>
+          <p:cNvSpPr>
+            <a:spLocks xmlns:a="http://schemas.openxmlformats.org/drawingml/2006/main" noGrp="1"/>
+          </p:cNvSpPr>
+          <p:nvPr/>
+        </p:nvSpPr>
+        <p:spPr>
+          <a:xfrm xmlns:a="http://schemas.openxmlformats.org/drawingml/2006/main">
+            <a:off x="1162050" y="2905125"/>
+            <a:ext cx="400050" cy="400050"/>
           </a:xfrm>
           <a:prstGeom xmlns:a="http://schemas.openxmlformats.org/drawingml/2006/main" prst="rect">
             <a:avLst/>
@@ -8470,9 +8474,9 @@
           <a:lstStyle xmlns:a="http://schemas.openxmlformats.org/drawingml/2006/main"/>
           <a:p xmlns:a="http://schemas.openxmlformats.org/drawingml/2006/main">
             <a:pPr algn="ctr">
-              <a:defRPr sz="1350" b="1">
-                <a:solidFill>
-                  <a:srgbClr val="FFFFFF"/>
+              <a:defRPr sz="1125" b="1">
+                <a:solidFill>
+                  <a:srgbClr val="2C6E73"/>
                 </a:solidFill>
                 <a:latin typeface="Arial"/>
                 <a:ea typeface="Arial"/>
@@ -8480,9 +8484,9 @@
               </a:defRPr>
             </a:pPr>
             <a:r>
-              <a:rPr sz="1350" b="1">
-                <a:solidFill>
-                  <a:srgbClr val="FFFFFF"/>
+              <a:rPr sz="1125" b="1">
+                <a:solidFill>
+                  <a:srgbClr val="2C6E73"/>
                 </a:solidFill>
                 <a:latin typeface="Arial"/>
                 <a:ea typeface="Arial"/>
@@ -8498,19 +8502,19 @@
           <p:cNvPr id="16" name="">
             <a:extLst xmlns:a="http://schemas.openxmlformats.org/drawingml/2006/main">
               <a:ext uri="{FF2B5EF4-FFF2-40B4-BE49-F238E27FC236}">
-                <a16:creationId xmlns:a16="http://schemas.microsoft.com/office/drawing/2014/main" id="{6DE57C46-BFEF-4E18-B03B-B1F432F2538B}"/>
-              </a:ext>
-            </a:extLst>
-          </p:cNvPr>
-          <p:cNvSpPr>
-            <a:spLocks xmlns:a="http://schemas.openxmlformats.org/drawingml/2006/main" noGrp="1"/>
-          </p:cNvSpPr>
-          <p:nvPr/>
-        </p:nvSpPr>
-        <p:spPr>
-          <a:xfrm xmlns:a="http://schemas.openxmlformats.org/drawingml/2006/main">
-            <a:off x="1714500" y="2924175"/>
-            <a:ext cx="9429750" cy="609600"/>
+                <a16:creationId xmlns:a16="http://schemas.microsoft.com/office/drawing/2014/main" id="{17E6D5FF-CE02-40B9-8E48-5E36893880CA}"/>
+              </a:ext>
+            </a:extLst>
+          </p:cNvPr>
+          <p:cNvSpPr>
+            <a:spLocks xmlns:a="http://schemas.openxmlformats.org/drawingml/2006/main" noGrp="1"/>
+          </p:cNvSpPr>
+          <p:nvPr/>
+        </p:nvSpPr>
+        <p:spPr>
+          <a:xfrm xmlns:a="http://schemas.openxmlformats.org/drawingml/2006/main">
+            <a:off x="1714500" y="2819400"/>
+            <a:ext cx="9525000" cy="638175"/>
           </a:xfrm>
           <a:prstGeom xmlns:a="http://schemas.openxmlformats.org/drawingml/2006/main" prst="rect">
             <a:avLst/>
@@ -8527,7 +8531,7 @@
           <a:lstStyle xmlns:a="http://schemas.openxmlformats.org/drawingml/2006/main"/>
           <a:p xmlns:a="http://schemas.openxmlformats.org/drawingml/2006/main">
             <a:pPr algn="l">
-              <a:defRPr sz="1500" b="0">
+              <a:defRPr sz="1575" b="0">
                 <a:solidFill>
                   <a:srgbClr val="17253A"/>
                 </a:solidFill>
@@ -8537,7 +8541,7 @@
               </a:defRPr>
             </a:pPr>
             <a:r>
-              <a:rPr sz="1500" b="0">
+              <a:rPr sz="1575" b="0">
                 <a:solidFill>
                   <a:srgbClr val="17253A"/>
                 </a:solidFill>
@@ -8545,7 +8549,7 @@
                 <a:ea typeface="Arial"/>
                 <a:cs typeface="Arial"/>
               </a:rPr>
-              <a:t>Set up the method: Express the relationship with words, a table or a formula.</a:t>
+              <a:t>12 - 7 = 5     17 - 12 = 5     22 - 17 = 5</a:t>
             </a:r>
           </a:p>
         </p:txBody>
@@ -8555,28 +8559,30 @@
           <p:cNvPr id="17" name="">
             <a:extLst xmlns:a="http://schemas.openxmlformats.org/drawingml/2006/main">
               <a:ext uri="{FF2B5EF4-FFF2-40B4-BE49-F238E27FC236}">
-                <a16:creationId xmlns:a16="http://schemas.microsoft.com/office/drawing/2014/main" id="{3E01C6F0-BE83-4E59-A4E4-BD1865DA29CE}"/>
-              </a:ext>
-            </a:extLst>
-          </p:cNvPr>
-          <p:cNvSpPr>
-            <a:spLocks xmlns:a="http://schemas.openxmlformats.org/drawingml/2006/main" noGrp="1"/>
-          </p:cNvSpPr>
-          <p:nvPr/>
-        </p:nvSpPr>
-        <p:spPr>
-          <a:xfrm xmlns:a="http://schemas.openxmlformats.org/drawingml/2006/main">
-            <a:off x="1000125" y="3733800"/>
-            <a:ext cx="476250" cy="476250"/>
-          </a:xfrm>
-          <a:prstGeom xmlns:a="http://schemas.openxmlformats.org/drawingml/2006/main" prst="ellipse">
+                <a16:creationId xmlns:a16="http://schemas.microsoft.com/office/drawing/2014/main" id="{063D6287-876A-4469-BD30-843482F2F39F}"/>
+              </a:ext>
+            </a:extLst>
+          </p:cNvPr>
+          <p:cNvSpPr>
+            <a:spLocks xmlns:a="http://schemas.openxmlformats.org/drawingml/2006/main" noGrp="1"/>
+          </p:cNvSpPr>
+          <p:nvPr/>
+        </p:nvSpPr>
+        <p:spPr>
+          <a:xfrm xmlns:a="http://schemas.openxmlformats.org/drawingml/2006/main">
+            <a:off x="1714500" y="3476625"/>
+            <a:ext cx="9334500" cy="9525"/>
+          </a:xfrm>
+          <a:prstGeom xmlns:a="http://schemas.openxmlformats.org/drawingml/2006/main" prst="rect">
             <a:avLst/>
           </a:prstGeom>
           <a:solidFill xmlns:a="http://schemas.openxmlformats.org/drawingml/2006/main">
-            <a:srgbClr val="2C6E73"/>
+            <a:srgbClr val="D9E0E6"/>
           </a:solidFill>
           <a:ln xmlns:a="http://schemas.openxmlformats.org/drawingml/2006/main" w="0">
-            <a:noFill/>
+            <a:solidFill>
+              <a:srgbClr val="D9E0E6"/>
+            </a:solidFill>
           </a:ln>
         </p:spPr>
       </p:sp>
@@ -8585,19 +8591,19 @@
           <p:cNvPr id="18" name="">
             <a:extLst xmlns:a="http://schemas.openxmlformats.org/drawingml/2006/main">
               <a:ext uri="{FF2B5EF4-FFF2-40B4-BE49-F238E27FC236}">
-                <a16:creationId xmlns:a16="http://schemas.microsoft.com/office/drawing/2014/main" id="{4D8C2034-01C2-494E-9788-693B97B45E25}"/>
-              </a:ext>
-            </a:extLst>
-          </p:cNvPr>
-          <p:cNvSpPr>
-            <a:spLocks xmlns:a="http://schemas.openxmlformats.org/drawingml/2006/main" noGrp="1"/>
-          </p:cNvSpPr>
-          <p:nvPr/>
-        </p:nvSpPr>
-        <p:spPr>
-          <a:xfrm xmlns:a="http://schemas.openxmlformats.org/drawingml/2006/main">
-            <a:off x="1000125" y="3762375"/>
-            <a:ext cx="476250" cy="419100"/>
+                <a16:creationId xmlns:a16="http://schemas.microsoft.com/office/drawing/2014/main" id="{8DAA1FB8-CEE9-4AF3-BEBB-BF35C5E648C2}"/>
+              </a:ext>
+            </a:extLst>
+          </p:cNvPr>
+          <p:cNvSpPr>
+            <a:spLocks xmlns:a="http://schemas.openxmlformats.org/drawingml/2006/main" noGrp="1"/>
+          </p:cNvSpPr>
+          <p:nvPr/>
+        </p:nvSpPr>
+        <p:spPr>
+          <a:xfrm xmlns:a="http://schemas.openxmlformats.org/drawingml/2006/main">
+            <a:off x="1162050" y="3609975"/>
+            <a:ext cx="400050" cy="400050"/>
           </a:xfrm>
           <a:prstGeom xmlns:a="http://schemas.openxmlformats.org/drawingml/2006/main" prst="rect">
             <a:avLst/>
@@ -8614,9 +8620,9 @@
           <a:lstStyle xmlns:a="http://schemas.openxmlformats.org/drawingml/2006/main"/>
           <a:p xmlns:a="http://schemas.openxmlformats.org/drawingml/2006/main">
             <a:pPr algn="ctr">
-              <a:defRPr sz="1350" b="1">
-                <a:solidFill>
-                  <a:srgbClr val="FFFFFF"/>
+              <a:defRPr sz="1125" b="1">
+                <a:solidFill>
+                  <a:srgbClr val="2C6E73"/>
                 </a:solidFill>
                 <a:latin typeface="Arial"/>
                 <a:ea typeface="Arial"/>
@@ -8624,9 +8630,9 @@
               </a:defRPr>
             </a:pPr>
             <a:r>
-              <a:rPr sz="1350" b="1">
-                <a:solidFill>
-                  <a:srgbClr val="FFFFFF"/>
+              <a:rPr sz="1125" b="1">
+                <a:solidFill>
+                  <a:srgbClr val="2C6E73"/>
                 </a:solidFill>
                 <a:latin typeface="Arial"/>
                 <a:ea typeface="Arial"/>
@@ -8642,19 +8648,19 @@
           <p:cNvPr id="19" name="">
             <a:extLst xmlns:a="http://schemas.openxmlformats.org/drawingml/2006/main">
               <a:ext uri="{FF2B5EF4-FFF2-40B4-BE49-F238E27FC236}">
-                <a16:creationId xmlns:a16="http://schemas.microsoft.com/office/drawing/2014/main" id="{F595D6FD-C9CF-4EA3-968F-6AAA827572EF}"/>
-              </a:ext>
-            </a:extLst>
-          </p:cNvPr>
-          <p:cNvSpPr>
-            <a:spLocks xmlns:a="http://schemas.openxmlformats.org/drawingml/2006/main" noGrp="1"/>
-          </p:cNvSpPr>
-          <p:nvPr/>
-        </p:nvSpPr>
-        <p:spPr>
-          <a:xfrm xmlns:a="http://schemas.openxmlformats.org/drawingml/2006/main">
-            <a:off x="1714500" y="3667125"/>
-            <a:ext cx="9429750" cy="609600"/>
+                <a16:creationId xmlns:a16="http://schemas.microsoft.com/office/drawing/2014/main" id="{0CB0D3B6-6258-48EC-A267-8665A34A3B17}"/>
+              </a:ext>
+            </a:extLst>
+          </p:cNvPr>
+          <p:cNvSpPr>
+            <a:spLocks xmlns:a="http://schemas.openxmlformats.org/drawingml/2006/main" noGrp="1"/>
+          </p:cNvSpPr>
+          <p:nvPr/>
+        </p:nvSpPr>
+        <p:spPr>
+          <a:xfrm xmlns:a="http://schemas.openxmlformats.org/drawingml/2006/main">
+            <a:off x="1714500" y="3524250"/>
+            <a:ext cx="9525000" cy="638175"/>
           </a:xfrm>
           <a:prstGeom xmlns:a="http://schemas.openxmlformats.org/drawingml/2006/main" prst="rect">
             <a:avLst/>
@@ -8671,7 +8677,7 @@
           <a:lstStyle xmlns:a="http://schemas.openxmlformats.org/drawingml/2006/main"/>
           <a:p xmlns:a="http://schemas.openxmlformats.org/drawingml/2006/main">
             <a:pPr algn="l">
-              <a:defRPr sz="1500" b="0">
+              <a:defRPr sz="1575" b="0">
                 <a:solidFill>
                   <a:srgbClr val="17253A"/>
                 </a:solidFill>
@@ -8681,7 +8687,7 @@
               </a:defRPr>
             </a:pPr>
             <a:r>
-              <a:rPr sz="1500" b="0">
+              <a:rPr sz="1575" b="0">
                 <a:solidFill>
                   <a:srgbClr val="17253A"/>
                 </a:solidFill>
@@ -8689,7 +8695,7 @@
                 <a:ea typeface="Arial"/>
                 <a:cs typeface="Arial"/>
               </a:rPr>
-              <a:t>Complete the calculation: 27, 32; add 5.</a:t>
+              <a:t>22 + 5 = 27</a:t>
             </a:r>
           </a:p>
         </p:txBody>
@@ -8699,28 +8705,30 @@
           <p:cNvPr id="20" name="">
             <a:extLst xmlns:a="http://schemas.openxmlformats.org/drawingml/2006/main">
               <a:ext uri="{FF2B5EF4-FFF2-40B4-BE49-F238E27FC236}">
-                <a16:creationId xmlns:a16="http://schemas.microsoft.com/office/drawing/2014/main" id="{F509D02B-A1D2-4B45-9769-1C25572FDCDF}"/>
-              </a:ext>
-            </a:extLst>
-          </p:cNvPr>
-          <p:cNvSpPr>
-            <a:spLocks xmlns:a="http://schemas.openxmlformats.org/drawingml/2006/main" noGrp="1"/>
-          </p:cNvSpPr>
-          <p:nvPr/>
-        </p:nvSpPr>
-        <p:spPr>
-          <a:xfrm xmlns:a="http://schemas.openxmlformats.org/drawingml/2006/main">
-            <a:off x="1000125" y="4476750"/>
-            <a:ext cx="476250" cy="476250"/>
-          </a:xfrm>
-          <a:prstGeom xmlns:a="http://schemas.openxmlformats.org/drawingml/2006/main" prst="ellipse">
+                <a16:creationId xmlns:a16="http://schemas.microsoft.com/office/drawing/2014/main" id="{E3F9E190-E05D-4FBE-918A-526A776DCA49}"/>
+              </a:ext>
+            </a:extLst>
+          </p:cNvPr>
+          <p:cNvSpPr>
+            <a:spLocks xmlns:a="http://schemas.openxmlformats.org/drawingml/2006/main" noGrp="1"/>
+          </p:cNvSpPr>
+          <p:nvPr/>
+        </p:nvSpPr>
+        <p:spPr>
+          <a:xfrm xmlns:a="http://schemas.openxmlformats.org/drawingml/2006/main">
+            <a:off x="1714500" y="4181475"/>
+            <a:ext cx="9334500" cy="9525"/>
+          </a:xfrm>
+          <a:prstGeom xmlns:a="http://schemas.openxmlformats.org/drawingml/2006/main" prst="rect">
             <a:avLst/>
           </a:prstGeom>
           <a:solidFill xmlns:a="http://schemas.openxmlformats.org/drawingml/2006/main">
-            <a:srgbClr val="2C6E73"/>
+            <a:srgbClr val="D9E0E6"/>
           </a:solidFill>
           <a:ln xmlns:a="http://schemas.openxmlformats.org/drawingml/2006/main" w="0">
-            <a:noFill/>
+            <a:solidFill>
+              <a:srgbClr val="D9E0E6"/>
+            </a:solidFill>
           </a:ln>
         </p:spPr>
       </p:sp>
@@ -8729,19 +8737,19 @@
           <p:cNvPr id="21" name="">
             <a:extLst xmlns:a="http://schemas.openxmlformats.org/drawingml/2006/main">
               <a:ext uri="{FF2B5EF4-FFF2-40B4-BE49-F238E27FC236}">
-                <a16:creationId xmlns:a16="http://schemas.microsoft.com/office/drawing/2014/main" id="{B01A35A2-EB4A-4AB6-90A8-59D998265EBC}"/>
-              </a:ext>
-            </a:extLst>
-          </p:cNvPr>
-          <p:cNvSpPr>
-            <a:spLocks xmlns:a="http://schemas.openxmlformats.org/drawingml/2006/main" noGrp="1"/>
-          </p:cNvSpPr>
-          <p:nvPr/>
-        </p:nvSpPr>
-        <p:spPr>
-          <a:xfrm xmlns:a="http://schemas.openxmlformats.org/drawingml/2006/main">
-            <a:off x="1000125" y="4505325"/>
-            <a:ext cx="476250" cy="419100"/>
+                <a16:creationId xmlns:a16="http://schemas.microsoft.com/office/drawing/2014/main" id="{77E128A3-A961-4753-819D-5BF4E8814340}"/>
+              </a:ext>
+            </a:extLst>
+          </p:cNvPr>
+          <p:cNvSpPr>
+            <a:spLocks xmlns:a="http://schemas.openxmlformats.org/drawingml/2006/main" noGrp="1"/>
+          </p:cNvSpPr>
+          <p:nvPr/>
+        </p:nvSpPr>
+        <p:spPr>
+          <a:xfrm xmlns:a="http://schemas.openxmlformats.org/drawingml/2006/main">
+            <a:off x="1162050" y="4314825"/>
+            <a:ext cx="400050" cy="400050"/>
           </a:xfrm>
           <a:prstGeom xmlns:a="http://schemas.openxmlformats.org/drawingml/2006/main" prst="rect">
             <a:avLst/>
@@ -8758,9 +8766,9 @@
           <a:lstStyle xmlns:a="http://schemas.openxmlformats.org/drawingml/2006/main"/>
           <a:p xmlns:a="http://schemas.openxmlformats.org/drawingml/2006/main">
             <a:pPr algn="ctr">
-              <a:defRPr sz="1350" b="1">
-                <a:solidFill>
-                  <a:srgbClr val="FFFFFF"/>
+              <a:defRPr sz="1125" b="1">
+                <a:solidFill>
+                  <a:srgbClr val="2C6E73"/>
                 </a:solidFill>
                 <a:latin typeface="Arial"/>
                 <a:ea typeface="Arial"/>
@@ -8768,9 +8776,9 @@
               </a:defRPr>
             </a:pPr>
             <a:r>
-              <a:rPr sz="1350" b="1">
-                <a:solidFill>
-                  <a:srgbClr val="FFFFFF"/>
+              <a:rPr sz="1125" b="1">
+                <a:solidFill>
+                  <a:srgbClr val="2C6E73"/>
                 </a:solidFill>
                 <a:latin typeface="Arial"/>
                 <a:ea typeface="Arial"/>
@@ -8786,19 +8794,19 @@
           <p:cNvPr id="22" name="">
             <a:extLst xmlns:a="http://schemas.openxmlformats.org/drawingml/2006/main">
               <a:ext uri="{FF2B5EF4-FFF2-40B4-BE49-F238E27FC236}">
-                <a16:creationId xmlns:a16="http://schemas.microsoft.com/office/drawing/2014/main" id="{AFE9982B-FA66-4199-A755-1BAEFD56B0B3}"/>
-              </a:ext>
-            </a:extLst>
-          </p:cNvPr>
-          <p:cNvSpPr>
-            <a:spLocks xmlns:a="http://schemas.openxmlformats.org/drawingml/2006/main" noGrp="1"/>
-          </p:cNvSpPr>
-          <p:nvPr/>
-        </p:nvSpPr>
-        <p:spPr>
-          <a:xfrm xmlns:a="http://schemas.openxmlformats.org/drawingml/2006/main">
-            <a:off x="1714500" y="4410075"/>
-            <a:ext cx="9429750" cy="609600"/>
+                <a16:creationId xmlns:a16="http://schemas.microsoft.com/office/drawing/2014/main" id="{10A9B643-FE3F-4FE3-8963-69EC22F3E857}"/>
+              </a:ext>
+            </a:extLst>
+          </p:cNvPr>
+          <p:cNvSpPr>
+            <a:spLocks xmlns:a="http://schemas.openxmlformats.org/drawingml/2006/main" noGrp="1"/>
+          </p:cNvSpPr>
+          <p:nvPr/>
+        </p:nvSpPr>
+        <p:spPr>
+          <a:xfrm xmlns:a="http://schemas.openxmlformats.org/drawingml/2006/main">
+            <a:off x="1714500" y="4229100"/>
+            <a:ext cx="9525000" cy="638175"/>
           </a:xfrm>
           <a:prstGeom xmlns:a="http://schemas.openxmlformats.org/drawingml/2006/main" prst="rect">
             <a:avLst/>
@@ -8815,9 +8823,9 @@
           <a:lstStyle xmlns:a="http://schemas.openxmlformats.org/drawingml/2006/main"/>
           <a:p xmlns:a="http://schemas.openxmlformats.org/drawingml/2006/main">
             <a:pPr algn="l">
-              <a:defRPr sz="1500" b="1">
-                <a:solidFill>
-                  <a:srgbClr val="2F785D"/>
+              <a:defRPr sz="1575" b="0">
+                <a:solidFill>
+                  <a:srgbClr val="17253A"/>
                 </a:solidFill>
                 <a:latin typeface="Arial"/>
                 <a:ea typeface="Arial"/>
@@ -8825,15 +8833,161 @@
               </a:defRPr>
             </a:pPr>
             <a:r>
-              <a:rPr sz="1500" b="1">
+              <a:rPr sz="1575" b="0">
+                <a:solidFill>
+                  <a:srgbClr val="17253A"/>
+                </a:solidFill>
+                <a:latin typeface="Arial"/>
+                <a:ea typeface="Arial"/>
+                <a:cs typeface="Arial"/>
+              </a:rPr>
+              <a:t>27 + 5 = 32</a:t>
+            </a:r>
+          </a:p>
+        </p:txBody>
+      </p:sp>
+      <p:sp>
+        <p:nvSpPr>
+          <p:cNvPr id="23" name="">
+            <a:extLst xmlns:a="http://schemas.openxmlformats.org/drawingml/2006/main">
+              <a:ext uri="{FF2B5EF4-FFF2-40B4-BE49-F238E27FC236}">
+                <a16:creationId xmlns:a16="http://schemas.microsoft.com/office/drawing/2014/main" id="{CD0E2905-D91A-47E9-B02E-9E0F41AF08B5}"/>
+              </a:ext>
+            </a:extLst>
+          </p:cNvPr>
+          <p:cNvSpPr>
+            <a:spLocks xmlns:a="http://schemas.openxmlformats.org/drawingml/2006/main" noGrp="1"/>
+          </p:cNvSpPr>
+          <p:nvPr/>
+        </p:nvSpPr>
+        <p:spPr>
+          <a:xfrm xmlns:a="http://schemas.openxmlformats.org/drawingml/2006/main">
+            <a:off x="1714500" y="4886325"/>
+            <a:ext cx="9334500" cy="9525"/>
+          </a:xfrm>
+          <a:prstGeom xmlns:a="http://schemas.openxmlformats.org/drawingml/2006/main" prst="rect">
+            <a:avLst/>
+          </a:prstGeom>
+          <a:solidFill xmlns:a="http://schemas.openxmlformats.org/drawingml/2006/main">
+            <a:srgbClr val="D9E0E6"/>
+          </a:solidFill>
+          <a:ln xmlns:a="http://schemas.openxmlformats.org/drawingml/2006/main" w="0">
+            <a:solidFill>
+              <a:srgbClr val="D9E0E6"/>
+            </a:solidFill>
+          </a:ln>
+        </p:spPr>
+      </p:sp>
+      <p:sp>
+        <p:nvSpPr>
+          <p:cNvPr id="24" name="">
+            <a:extLst xmlns:a="http://schemas.openxmlformats.org/drawingml/2006/main">
+              <a:ext uri="{FF2B5EF4-FFF2-40B4-BE49-F238E27FC236}">
+                <a16:creationId xmlns:a16="http://schemas.microsoft.com/office/drawing/2014/main" id="{0BD1622A-E3BD-4039-BBE8-B083B62B1A78}"/>
+              </a:ext>
+            </a:extLst>
+          </p:cNvPr>
+          <p:cNvSpPr>
+            <a:spLocks xmlns:a="http://schemas.openxmlformats.org/drawingml/2006/main" noGrp="1"/>
+          </p:cNvSpPr>
+          <p:nvPr/>
+        </p:nvSpPr>
+        <p:spPr>
+          <a:xfrm xmlns:a="http://schemas.openxmlformats.org/drawingml/2006/main">
+            <a:off x="1162050" y="5019675"/>
+            <a:ext cx="400050" cy="400050"/>
+          </a:xfrm>
+          <a:prstGeom xmlns:a="http://schemas.openxmlformats.org/drawingml/2006/main" prst="rect">
+            <a:avLst/>
+          </a:prstGeom>
+          <a:noFill xmlns:a="http://schemas.openxmlformats.org/drawingml/2006/main"/>
+          <a:ln xmlns:a="http://schemas.openxmlformats.org/drawingml/2006/main" w="0">
+            <a:noFill/>
+          </a:ln>
+        </p:spPr>
+        <p:txBody>
+          <a:bodyPr xmlns:a="http://schemas.openxmlformats.org/drawingml/2006/main" anchor="ctr">
+            <a:normAutofit fontScale="100000"/>
+          </a:bodyPr>
+          <a:lstStyle xmlns:a="http://schemas.openxmlformats.org/drawingml/2006/main"/>
+          <a:p xmlns:a="http://schemas.openxmlformats.org/drawingml/2006/main">
+            <a:pPr algn="ctr">
+              <a:defRPr sz="1125" b="1">
                 <a:solidFill>
                   <a:srgbClr val="2F785D"/>
                 </a:solidFill>
                 <a:latin typeface="Arial"/>
                 <a:ea typeface="Arial"/>
                 <a:cs typeface="Arial"/>
+              </a:defRPr>
+            </a:pPr>
+            <a:r>
+              <a:rPr sz="1125" b="1">
+                <a:solidFill>
+                  <a:srgbClr val="2F785D"/>
+                </a:solidFill>
+                <a:latin typeface="Arial"/>
+                <a:ea typeface="Arial"/>
+                <a:cs typeface="Arial"/>
               </a:rPr>
-              <a:t>Check the result: Substitute carefully and check against known terms.</a:t>
+              <a:t>5</a:t>
+            </a:r>
+          </a:p>
+        </p:txBody>
+      </p:sp>
+      <p:sp>
+        <p:nvSpPr>
+          <p:cNvPr id="25" name="">
+            <a:extLst xmlns:a="http://schemas.openxmlformats.org/drawingml/2006/main">
+              <a:ext uri="{FF2B5EF4-FFF2-40B4-BE49-F238E27FC236}">
+                <a16:creationId xmlns:a16="http://schemas.microsoft.com/office/drawing/2014/main" id="{49AE2393-289F-427E-AB4A-E22FC37556E6}"/>
+              </a:ext>
+            </a:extLst>
+          </p:cNvPr>
+          <p:cNvSpPr>
+            <a:spLocks xmlns:a="http://schemas.openxmlformats.org/drawingml/2006/main" noGrp="1"/>
+          </p:cNvSpPr>
+          <p:nvPr/>
+        </p:nvSpPr>
+        <p:spPr>
+          <a:xfrm xmlns:a="http://schemas.openxmlformats.org/drawingml/2006/main">
+            <a:off x="1714500" y="4933950"/>
+            <a:ext cx="9525000" cy="638175"/>
+          </a:xfrm>
+          <a:prstGeom xmlns:a="http://schemas.openxmlformats.org/drawingml/2006/main" prst="rect">
+            <a:avLst/>
+          </a:prstGeom>
+          <a:noFill xmlns:a="http://schemas.openxmlformats.org/drawingml/2006/main"/>
+          <a:ln xmlns:a="http://schemas.openxmlformats.org/drawingml/2006/main" w="0">
+            <a:noFill/>
+          </a:ln>
+        </p:spPr>
+        <p:txBody>
+          <a:bodyPr xmlns:a="http://schemas.openxmlformats.org/drawingml/2006/main" anchor="ctr">
+            <a:normAutofit fontScale="100000"/>
+          </a:bodyPr>
+          <a:lstStyle xmlns:a="http://schemas.openxmlformats.org/drawingml/2006/main"/>
+          <a:p xmlns:a="http://schemas.openxmlformats.org/drawingml/2006/main">
+            <a:pPr algn="l">
+              <a:defRPr sz="1575" b="1">
+                <a:solidFill>
+                  <a:srgbClr val="2F785D"/>
+                </a:solidFill>
+                <a:latin typeface="Arial"/>
+                <a:ea typeface="Arial"/>
+                <a:cs typeface="Arial"/>
+              </a:defRPr>
+            </a:pPr>
+            <a:r>
+              <a:rPr sz="1575" b="1">
+                <a:solidFill>
+                  <a:srgbClr val="2F785D"/>
+                </a:solidFill>
+                <a:latin typeface="Arial"/>
+                <a:ea typeface="Arial"/>
+                <a:cs typeface="Arial"/>
+              </a:rPr>
+              <a:t>Rule: add 5 each time</a:t>
             </a:r>
           </a:p>
         </p:txBody>
@@ -8841,7 +8995,7 @@
     </p:spTree>
     <p:extLst>
       <p:ext uri="{BB962C8B-B14F-4D97-AF65-F5344CB8AC3E}">
-        <p14:creationId xmlns:p14="http://schemas.microsoft.com/office/powerpoint/2010/main" val="1370571434"/>
+        <p14:creationId xmlns:p14="http://schemas.microsoft.com/office/powerpoint/2010/main" val="754048502"/>
       </p:ext>
     </p:extLst>
   </p:cSld>
@@ -9078,6 +9232,51 @@
                       </p:childTnLst>
                     </p:cTn>
                   </p:par>
+                  <p:par>
+                    <p:cTn id="23" fill="hold">
+                      <p:stCondLst>
+                        <p:cond delay="indefinite"/>
+                      </p:stCondLst>
+                      <p:childTnLst>
+                        <p:par>
+                          <p:cTn id="24" fill="hold">
+                            <p:stCondLst>
+                              <p:cond delay="0"/>
+                            </p:stCondLst>
+                            <p:childTnLst>
+                              <p:par>
+                                <p:cTn id="25" presetID="1" presetClass="entr" presetSubtype="0" fill="hold" grpId="0" nodeType="clickEffect">
+                                  <p:stCondLst>
+                                    <p:cond delay="0"/>
+                                  </p:stCondLst>
+                                  <p:childTnLst>
+                                    <p:set>
+                                      <p:cBhvr>
+                                        <p:cTn id="26" dur="1" fill="hold">
+                                          <p:stCondLst>
+                                            <p:cond delay="0"/>
+                                          </p:stCondLst>
+                                        </p:cTn>
+                                        <p:tgtEl>
+                                          <p:spTgt spid="25"/>
+                                        </p:tgtEl>
+                                        <p:attrNameLst>
+                                          <p:attrName>style.visibility</p:attrName>
+                                        </p:attrNameLst>
+                                      </p:cBhvr>
+                                      <p:to>
+                                        <p:strVal val="visible"/>
+                                      </p:to>
+                                    </p:set>
+                                  </p:childTnLst>
+                                </p:cTn>
+                              </p:par>
+                            </p:childTnLst>
+                          </p:cTn>
+                        </p:par>
+                      </p:childTnLst>
+                    </p:cTn>
+                  </p:par>
                 </p:childTnLst>
               </p:cTn>
               <p:prevCondLst>
@@ -9105,6 +9304,7 @@
       <p:bldP spid="16" grpId="0"/>
       <p:bldP spid="19" grpId="0"/>
       <p:bldP spid="22" grpId="0"/>
+      <p:bldP spid="25" grpId="0"/>
     </p:bldLst>
   </p:timing>
 </p:sld>
@@ -9134,7 +9334,7 @@
           <p:cNvPr id="15" name="">
             <a:extLst xmlns:a="http://schemas.openxmlformats.org/drawingml/2006/main">
               <a:ext uri="{FF2B5EF4-FFF2-40B4-BE49-F238E27FC236}">
-                <a16:creationId xmlns:a16="http://schemas.microsoft.com/office/drawing/2014/main" id="{24E95573-4AD3-4592-94E9-5EACC63C438F}"/>
+                <a16:creationId xmlns:a16="http://schemas.microsoft.com/office/drawing/2014/main" id="{CA90F048-7EF2-4238-96E7-4E8C38A0F85D}"/>
               </a:ext>
             </a:extLst>
           </p:cNvPr>
@@ -9166,7 +9366,7 @@
           <p:cNvPr id="2" name="">
             <a:extLst xmlns:a="http://schemas.openxmlformats.org/drawingml/2006/main">
               <a:ext uri="{FF2B5EF4-FFF2-40B4-BE49-F238E27FC236}">
-                <a16:creationId xmlns:a16="http://schemas.microsoft.com/office/drawing/2014/main" id="{86846E0F-5CEF-4CF0-88FA-0E1C7925E00E}"/>
+                <a16:creationId xmlns:a16="http://schemas.microsoft.com/office/drawing/2014/main" id="{6F3DD393-BD80-48C8-BC5C-24C8C190CCD1}"/>
               </a:ext>
             </a:extLst>
           </p:cNvPr>
@@ -9223,7 +9423,7 @@
           <p:cNvPr id="3" name="">
             <a:extLst xmlns:a="http://schemas.openxmlformats.org/drawingml/2006/main">
               <a:ext uri="{FF2B5EF4-FFF2-40B4-BE49-F238E27FC236}">
-                <a16:creationId xmlns:a16="http://schemas.microsoft.com/office/drawing/2014/main" id="{5E425BD1-BFE9-4DC6-B87B-71CBB39B11F6}"/>
+                <a16:creationId xmlns:a16="http://schemas.microsoft.com/office/drawing/2014/main" id="{F4E00610-8F22-4FD5-9158-074C0DD15F62}"/>
               </a:ext>
             </a:extLst>
           </p:cNvPr>
@@ -9255,7 +9455,7 @@
           <p:cNvPr id="4" name="">
             <a:extLst xmlns:a="http://schemas.openxmlformats.org/drawingml/2006/main">
               <a:ext uri="{FF2B5EF4-FFF2-40B4-BE49-F238E27FC236}">
-                <a16:creationId xmlns:a16="http://schemas.microsoft.com/office/drawing/2014/main" id="{CEB72822-1E1F-45D7-8DDD-0D10350B2FE0}"/>
+                <a16:creationId xmlns:a16="http://schemas.microsoft.com/office/drawing/2014/main" id="{F952AF42-BE01-434A-8B18-DB9F9F059952}"/>
               </a:ext>
             </a:extLst>
           </p:cNvPr>
@@ -9312,7 +9512,7 @@
           <p:cNvPr id="5" name="">
             <a:extLst xmlns:a="http://schemas.openxmlformats.org/drawingml/2006/main">
               <a:ext uri="{FF2B5EF4-FFF2-40B4-BE49-F238E27FC236}">
-                <a16:creationId xmlns:a16="http://schemas.microsoft.com/office/drawing/2014/main" id="{110D8AAA-1169-41BF-A20D-759BA1D3D1A9}"/>
+                <a16:creationId xmlns:a16="http://schemas.microsoft.com/office/drawing/2014/main" id="{36103BC3-4C13-43AD-B40B-792E382E0002}"/>
               </a:ext>
             </a:extLst>
           </p:cNvPr>
@@ -9369,7 +9569,7 @@
           <p:cNvPr id="6" name="">
             <a:extLst xmlns:a="http://schemas.openxmlformats.org/drawingml/2006/main">
               <a:ext uri="{FF2B5EF4-FFF2-40B4-BE49-F238E27FC236}">
-                <a16:creationId xmlns:a16="http://schemas.microsoft.com/office/drawing/2014/main" id="{F70AF7AD-7D45-4E57-8FC8-289FCF28A76C}"/>
+                <a16:creationId xmlns:a16="http://schemas.microsoft.com/office/drawing/2014/main" id="{E8793878-9A51-423F-922C-C2195B8F2086}"/>
               </a:ext>
             </a:extLst>
           </p:cNvPr>
@@ -9426,7 +9626,7 @@
           <p:cNvPr id="7" name="">
             <a:extLst xmlns:a="http://schemas.openxmlformats.org/drawingml/2006/main">
               <a:ext uri="{FF2B5EF4-FFF2-40B4-BE49-F238E27FC236}">
-                <a16:creationId xmlns:a16="http://schemas.microsoft.com/office/drawing/2014/main" id="{304749BE-607D-42D4-BDB7-3FA237F3A22F}"/>
+                <a16:creationId xmlns:a16="http://schemas.microsoft.com/office/drawing/2014/main" id="{EA537598-B444-4F29-924D-1674111834A5}"/>
               </a:ext>
             </a:extLst>
           </p:cNvPr>
@@ -9458,7 +9658,7 @@
           <p:cNvPr id="8" name="">
             <a:extLst xmlns:a="http://schemas.openxmlformats.org/drawingml/2006/main">
               <a:ext uri="{FF2B5EF4-FFF2-40B4-BE49-F238E27FC236}">
-                <a16:creationId xmlns:a16="http://schemas.microsoft.com/office/drawing/2014/main" id="{B851B89A-0E62-4286-A18C-BE643313F578}"/>
+                <a16:creationId xmlns:a16="http://schemas.microsoft.com/office/drawing/2014/main" id="{9080456B-3EB8-499B-8C98-998719B4ECEE}"/>
               </a:ext>
             </a:extLst>
           </p:cNvPr>
@@ -9515,7 +9715,7 @@
           <p:cNvPr id="9" name="">
             <a:extLst xmlns:a="http://schemas.openxmlformats.org/drawingml/2006/main">
               <a:ext uri="{FF2B5EF4-FFF2-40B4-BE49-F238E27FC236}">
-                <a16:creationId xmlns:a16="http://schemas.microsoft.com/office/drawing/2014/main" id="{D3561D26-D19A-4AD2-B078-E9C3FCF3A150}"/>
+                <a16:creationId xmlns:a16="http://schemas.microsoft.com/office/drawing/2014/main" id="{18B4F7C7-7C50-4BE2-B6EA-10C3BBB3AB2D}"/>
               </a:ext>
             </a:extLst>
           </p:cNvPr>
@@ -9572,7 +9772,7 @@
           <p:cNvPr id="10" name="">
             <a:extLst xmlns:a="http://schemas.openxmlformats.org/drawingml/2006/main">
               <a:ext uri="{FF2B5EF4-FFF2-40B4-BE49-F238E27FC236}">
-                <a16:creationId xmlns:a16="http://schemas.microsoft.com/office/drawing/2014/main" id="{AF5E98D6-A2A7-4695-9FD0-7D08F1B7B713}"/>
+                <a16:creationId xmlns:a16="http://schemas.microsoft.com/office/drawing/2014/main" id="{0E13AFB8-0F3E-4967-88A5-8EDDF33FA936}"/>
               </a:ext>
             </a:extLst>
           </p:cNvPr>
@@ -9629,7 +9829,7 @@
           <p:cNvPr id="11" name="">
             <a:extLst xmlns:a="http://schemas.openxmlformats.org/drawingml/2006/main">
               <a:ext uri="{FF2B5EF4-FFF2-40B4-BE49-F238E27FC236}">
-                <a16:creationId xmlns:a16="http://schemas.microsoft.com/office/drawing/2014/main" id="{728C0BE4-DF0A-40C5-9912-558A6E680000}"/>
+                <a16:creationId xmlns:a16="http://schemas.microsoft.com/office/drawing/2014/main" id="{C70C731C-0F2D-419E-9A58-0554DFA16FA8}"/>
               </a:ext>
             </a:extLst>
           </p:cNvPr>
@@ -9686,7 +9886,7 @@
           <p:cNvPr id="12" name="">
             <a:extLst xmlns:a="http://schemas.openxmlformats.org/drawingml/2006/main">
               <a:ext uri="{FF2B5EF4-FFF2-40B4-BE49-F238E27FC236}">
-                <a16:creationId xmlns:a16="http://schemas.microsoft.com/office/drawing/2014/main" id="{60FED269-6AB7-47DA-87D6-FE754B838EB7}"/>
+                <a16:creationId xmlns:a16="http://schemas.microsoft.com/office/drawing/2014/main" id="{8102F931-4A11-40F9-A9C8-31D71846150D}"/>
               </a:ext>
             </a:extLst>
           </p:cNvPr>
@@ -9718,7 +9918,7 @@
           <p:cNvPr id="13" name="">
             <a:extLst xmlns:a="http://schemas.openxmlformats.org/drawingml/2006/main">
               <a:ext uri="{FF2B5EF4-FFF2-40B4-BE49-F238E27FC236}">
-                <a16:creationId xmlns:a16="http://schemas.microsoft.com/office/drawing/2014/main" id="{0B325424-C411-454A-85CB-073C98A3C59E}"/>
+                <a16:creationId xmlns:a16="http://schemas.microsoft.com/office/drawing/2014/main" id="{BED75D7D-4611-42B6-ACBB-0E6C74DD0483}"/>
               </a:ext>
             </a:extLst>
           </p:cNvPr>
@@ -9775,7 +9975,7 @@
           <p:cNvPr id="14" name="">
             <a:extLst xmlns:a="http://schemas.openxmlformats.org/drawingml/2006/main">
               <a:ext uri="{FF2B5EF4-FFF2-40B4-BE49-F238E27FC236}">
-                <a16:creationId xmlns:a16="http://schemas.microsoft.com/office/drawing/2014/main" id="{F47C4FD6-4E8C-45DF-ABB1-8522DDA2D4F8}"/>
+                <a16:creationId xmlns:a16="http://schemas.microsoft.com/office/drawing/2014/main" id="{D0EE6EEA-DCE8-40EC-AEC9-164FA19EC825}"/>
               </a:ext>
             </a:extLst>
           </p:cNvPr>
@@ -9830,7 +10030,7 @@
     </p:spTree>
     <p:extLst>
       <p:ext uri="{BB962C8B-B14F-4D97-AF65-F5344CB8AC3E}">
-        <p14:creationId xmlns:p14="http://schemas.microsoft.com/office/powerpoint/2010/main" val="1486074507"/>
+        <p14:creationId xmlns:p14="http://schemas.microsoft.com/office/powerpoint/2010/main" val="1784623433"/>
       </p:ext>
     </p:extLst>
   </p:cSld>
@@ -10031,7 +10231,7 @@
           <p:cNvPr id="16" name="">
             <a:extLst xmlns:a="http://schemas.openxmlformats.org/drawingml/2006/main">
               <a:ext uri="{FF2B5EF4-FFF2-40B4-BE49-F238E27FC236}">
-                <a16:creationId xmlns:a16="http://schemas.microsoft.com/office/drawing/2014/main" id="{45B173BA-F0A4-42FD-B671-ABA8DAE48B8B}"/>
+                <a16:creationId xmlns:a16="http://schemas.microsoft.com/office/drawing/2014/main" id="{E5609AE3-E382-46F3-8E99-8948122B56FA}"/>
               </a:ext>
             </a:extLst>
           </p:cNvPr>
@@ -10063,7 +10263,7 @@
           <p:cNvPr id="2" name="">
             <a:extLst xmlns:a="http://schemas.openxmlformats.org/drawingml/2006/main">
               <a:ext uri="{FF2B5EF4-FFF2-40B4-BE49-F238E27FC236}">
-                <a16:creationId xmlns:a16="http://schemas.microsoft.com/office/drawing/2014/main" id="{B75BA9CA-BA95-48FD-B081-077C80BF4620}"/>
+                <a16:creationId xmlns:a16="http://schemas.microsoft.com/office/drawing/2014/main" id="{C6429E15-82D7-4F7B-8468-D0B3335BEA9A}"/>
               </a:ext>
             </a:extLst>
           </p:cNvPr>
@@ -10120,7 +10320,7 @@
           <p:cNvPr id="3" name="">
             <a:extLst xmlns:a="http://schemas.openxmlformats.org/drawingml/2006/main">
               <a:ext uri="{FF2B5EF4-FFF2-40B4-BE49-F238E27FC236}">
-                <a16:creationId xmlns:a16="http://schemas.microsoft.com/office/drawing/2014/main" id="{5A214F5F-77F1-4308-9565-C25AA8B125EB}"/>
+                <a16:creationId xmlns:a16="http://schemas.microsoft.com/office/drawing/2014/main" id="{D6FED18C-C05C-40B2-8B30-F4C3AC565380}"/>
               </a:ext>
             </a:extLst>
           </p:cNvPr>
@@ -10152,7 +10352,7 @@
           <p:cNvPr id="4" name="">
             <a:extLst xmlns:a="http://schemas.openxmlformats.org/drawingml/2006/main">
               <a:ext uri="{FF2B5EF4-FFF2-40B4-BE49-F238E27FC236}">
-                <a16:creationId xmlns:a16="http://schemas.microsoft.com/office/drawing/2014/main" id="{AEDBE23C-A1E9-405D-9360-A51327A81381}"/>
+                <a16:creationId xmlns:a16="http://schemas.microsoft.com/office/drawing/2014/main" id="{80D953B2-C929-4330-B9EC-0E9C3E413C7D}"/>
               </a:ext>
             </a:extLst>
           </p:cNvPr>
@@ -10209,7 +10409,7 @@
           <p:cNvPr id="5" name="">
             <a:extLst xmlns:a="http://schemas.openxmlformats.org/drawingml/2006/main">
               <a:ext uri="{FF2B5EF4-FFF2-40B4-BE49-F238E27FC236}">
-                <a16:creationId xmlns:a16="http://schemas.microsoft.com/office/drawing/2014/main" id="{87C5C176-C8E3-435D-9830-D72F03BC5133}"/>
+                <a16:creationId xmlns:a16="http://schemas.microsoft.com/office/drawing/2014/main" id="{56663633-9594-4E22-9BE1-9A93C1256378}"/>
               </a:ext>
             </a:extLst>
           </p:cNvPr>
@@ -10266,7 +10466,7 @@
           <p:cNvPr id="6" name="">
             <a:extLst xmlns:a="http://schemas.openxmlformats.org/drawingml/2006/main">
               <a:ext uri="{FF2B5EF4-FFF2-40B4-BE49-F238E27FC236}">
-                <a16:creationId xmlns:a16="http://schemas.microsoft.com/office/drawing/2014/main" id="{DCB85AC4-2152-4DEA-AB7F-DAC1CF4CC8D7}"/>
+                <a16:creationId xmlns:a16="http://schemas.microsoft.com/office/drawing/2014/main" id="{B2DBE5E1-2A63-4296-AD2F-5133B82B6D9C}"/>
               </a:ext>
             </a:extLst>
           </p:cNvPr>
@@ -10323,7 +10523,7 @@
           <p:cNvPr id="7" name="">
             <a:extLst xmlns:a="http://schemas.openxmlformats.org/drawingml/2006/main">
               <a:ext uri="{FF2B5EF4-FFF2-40B4-BE49-F238E27FC236}">
-                <a16:creationId xmlns:a16="http://schemas.microsoft.com/office/drawing/2014/main" id="{B94DABE1-85DB-47D5-9B90-CC9D73EF0A88}"/>
+                <a16:creationId xmlns:a16="http://schemas.microsoft.com/office/drawing/2014/main" id="{0D0D9E8A-A508-4247-B879-9833BD43214E}"/>
               </a:ext>
             </a:extLst>
           </p:cNvPr>
@@ -10355,7 +10555,7 @@
           <p:cNvPr id="8" name="">
             <a:extLst xmlns:a="http://schemas.openxmlformats.org/drawingml/2006/main">
               <a:ext uri="{FF2B5EF4-FFF2-40B4-BE49-F238E27FC236}">
-                <a16:creationId xmlns:a16="http://schemas.microsoft.com/office/drawing/2014/main" id="{6851F39F-BA88-4F17-85C2-678F30734D15}"/>
+                <a16:creationId xmlns:a16="http://schemas.microsoft.com/office/drawing/2014/main" id="{A55F0D29-2106-4618-B7B1-848BC2CC00ED}"/>
               </a:ext>
             </a:extLst>
           </p:cNvPr>
@@ -10412,7 +10612,7 @@
           <p:cNvPr id="9" name="">
             <a:extLst xmlns:a="http://schemas.openxmlformats.org/drawingml/2006/main">
               <a:ext uri="{FF2B5EF4-FFF2-40B4-BE49-F238E27FC236}">
-                <a16:creationId xmlns:a16="http://schemas.microsoft.com/office/drawing/2014/main" id="{B75800A1-A57B-431D-95D4-CCFF174550D5}"/>
+                <a16:creationId xmlns:a16="http://schemas.microsoft.com/office/drawing/2014/main" id="{65BD85B0-4C50-4EDD-AB88-8713D2A4E9E7}"/>
               </a:ext>
             </a:extLst>
           </p:cNvPr>
@@ -10469,7 +10669,7 @@
           <p:cNvPr id="10" name="">
             <a:extLst xmlns:a="http://schemas.openxmlformats.org/drawingml/2006/main">
               <a:ext uri="{FF2B5EF4-FFF2-40B4-BE49-F238E27FC236}">
-                <a16:creationId xmlns:a16="http://schemas.microsoft.com/office/drawing/2014/main" id="{A74721FA-4991-403E-9F35-289DC6383139}"/>
+                <a16:creationId xmlns:a16="http://schemas.microsoft.com/office/drawing/2014/main" id="{617CB26E-4303-49B9-999D-586E6A15AD09}"/>
               </a:ext>
             </a:extLst>
           </p:cNvPr>
@@ -10526,7 +10726,7 @@
           <p:cNvPr id="11" name="">
             <a:extLst xmlns:a="http://schemas.openxmlformats.org/drawingml/2006/main">
               <a:ext uri="{FF2B5EF4-FFF2-40B4-BE49-F238E27FC236}">
-                <a16:creationId xmlns:a16="http://schemas.microsoft.com/office/drawing/2014/main" id="{5C40E2D2-489E-4229-8430-2C66AAEA1FD7}"/>
+                <a16:creationId xmlns:a16="http://schemas.microsoft.com/office/drawing/2014/main" id="{D39A40D7-33D7-400B-8FEC-CFE729085471}"/>
               </a:ext>
             </a:extLst>
           </p:cNvPr>
@@ -10583,7 +10783,7 @@
           <p:cNvPr id="12" name="">
             <a:extLst xmlns:a="http://schemas.openxmlformats.org/drawingml/2006/main">
               <a:ext uri="{FF2B5EF4-FFF2-40B4-BE49-F238E27FC236}">
-                <a16:creationId xmlns:a16="http://schemas.microsoft.com/office/drawing/2014/main" id="{A2BF47F0-7930-4929-8318-A033AC205D76}"/>
+                <a16:creationId xmlns:a16="http://schemas.microsoft.com/office/drawing/2014/main" id="{4229C5E1-C4D1-4534-ABEE-3459B1C22060}"/>
               </a:ext>
             </a:extLst>
           </p:cNvPr>
@@ -10640,7 +10840,7 @@
           <p:cNvPr id="13" name="">
             <a:extLst xmlns:a="http://schemas.openxmlformats.org/drawingml/2006/main">
               <a:ext uri="{FF2B5EF4-FFF2-40B4-BE49-F238E27FC236}">
-                <a16:creationId xmlns:a16="http://schemas.microsoft.com/office/drawing/2014/main" id="{5172C604-7448-430B-8582-D9EC1FADE907}"/>
+                <a16:creationId xmlns:a16="http://schemas.microsoft.com/office/drawing/2014/main" id="{ADAD414E-C9FF-4246-A2E2-856416FB4657}"/>
               </a:ext>
             </a:extLst>
           </p:cNvPr>
@@ -10697,7 +10897,7 @@
           <p:cNvPr id="14" name="">
             <a:extLst xmlns:a="http://schemas.openxmlformats.org/drawingml/2006/main">
               <a:ext uri="{FF2B5EF4-FFF2-40B4-BE49-F238E27FC236}">
-                <a16:creationId xmlns:a16="http://schemas.microsoft.com/office/drawing/2014/main" id="{C288B22E-BB91-4084-9A85-AF28FB62F34A}"/>
+                <a16:creationId xmlns:a16="http://schemas.microsoft.com/office/drawing/2014/main" id="{781EF939-E0CA-4123-9E02-01747D2F3D10}"/>
               </a:ext>
             </a:extLst>
           </p:cNvPr>
@@ -10754,7 +10954,7 @@
           <p:cNvPr id="15" name="">
             <a:extLst xmlns:a="http://schemas.openxmlformats.org/drawingml/2006/main">
               <a:ext uri="{FF2B5EF4-FFF2-40B4-BE49-F238E27FC236}">
-                <a16:creationId xmlns:a16="http://schemas.microsoft.com/office/drawing/2014/main" id="{DC8BAA71-E6B8-4676-9426-579C9021BB19}"/>
+                <a16:creationId xmlns:a16="http://schemas.microsoft.com/office/drawing/2014/main" id="{BF301228-F1FD-4E2C-917F-1A51A6A1750D}"/>
               </a:ext>
             </a:extLst>
           </p:cNvPr>
@@ -10809,7 +11009,7 @@
     </p:spTree>
     <p:extLst>
       <p:ext uri="{BB962C8B-B14F-4D97-AF65-F5344CB8AC3E}">
-        <p14:creationId xmlns:p14="http://schemas.microsoft.com/office/powerpoint/2010/main" val="1984735229"/>
+        <p14:creationId xmlns:p14="http://schemas.microsoft.com/office/powerpoint/2010/main" val="1684247620"/>
       </p:ext>
     </p:extLst>
   </p:cSld>
@@ -10964,7 +11164,7 @@
           <p:cNvPr id="16" name="">
             <a:extLst xmlns:a="http://schemas.openxmlformats.org/drawingml/2006/main">
               <a:ext uri="{FF2B5EF4-FFF2-40B4-BE49-F238E27FC236}">
-                <a16:creationId xmlns:a16="http://schemas.microsoft.com/office/drawing/2014/main" id="{5F3AC705-B926-45D6-BE10-A2E040B11616}"/>
+                <a16:creationId xmlns:a16="http://schemas.microsoft.com/office/drawing/2014/main" id="{8D51A1EB-3B70-4457-8E08-E6EB3C84B923}"/>
               </a:ext>
             </a:extLst>
           </p:cNvPr>
@@ -10996,7 +11196,7 @@
           <p:cNvPr id="2" name="">
             <a:extLst xmlns:a="http://schemas.openxmlformats.org/drawingml/2006/main">
               <a:ext uri="{FF2B5EF4-FFF2-40B4-BE49-F238E27FC236}">
-                <a16:creationId xmlns:a16="http://schemas.microsoft.com/office/drawing/2014/main" id="{B0A177BA-6834-47FC-B5D2-E6621B87EFB5}"/>
+                <a16:creationId xmlns:a16="http://schemas.microsoft.com/office/drawing/2014/main" id="{6FBE3599-F065-4F28-9321-26FD2C873849}"/>
               </a:ext>
             </a:extLst>
           </p:cNvPr>
@@ -11053,7 +11253,7 @@
           <p:cNvPr id="3" name="">
             <a:extLst xmlns:a="http://schemas.openxmlformats.org/drawingml/2006/main">
               <a:ext uri="{FF2B5EF4-FFF2-40B4-BE49-F238E27FC236}">
-                <a16:creationId xmlns:a16="http://schemas.microsoft.com/office/drawing/2014/main" id="{C6419904-D489-411B-8F43-7DD03C34505B}"/>
+                <a16:creationId xmlns:a16="http://schemas.microsoft.com/office/drawing/2014/main" id="{7D51C10E-EF13-4857-BCEC-084E2E21F7FF}"/>
               </a:ext>
             </a:extLst>
           </p:cNvPr>
@@ -11085,7 +11285,7 @@
           <p:cNvPr id="4" name="">
             <a:extLst xmlns:a="http://schemas.openxmlformats.org/drawingml/2006/main">
               <a:ext uri="{FF2B5EF4-FFF2-40B4-BE49-F238E27FC236}">
-                <a16:creationId xmlns:a16="http://schemas.microsoft.com/office/drawing/2014/main" id="{F2DAB0B1-EC97-44C9-B9C0-013BB2DFD76E}"/>
+                <a16:creationId xmlns:a16="http://schemas.microsoft.com/office/drawing/2014/main" id="{D32977A9-98AD-4D05-B3DC-0F4101B67946}"/>
               </a:ext>
             </a:extLst>
           </p:cNvPr>
@@ -11142,7 +11342,7 @@
           <p:cNvPr id="5" name="">
             <a:extLst xmlns:a="http://schemas.openxmlformats.org/drawingml/2006/main">
               <a:ext uri="{FF2B5EF4-FFF2-40B4-BE49-F238E27FC236}">
-                <a16:creationId xmlns:a16="http://schemas.microsoft.com/office/drawing/2014/main" id="{FC4E9302-1EA5-48CA-BB51-D1F50DFFB741}"/>
+                <a16:creationId xmlns:a16="http://schemas.microsoft.com/office/drawing/2014/main" id="{E7983C2A-D86A-49F6-A31E-E7435CAE3994}"/>
               </a:ext>
             </a:extLst>
           </p:cNvPr>
@@ -11199,7 +11399,7 @@
           <p:cNvPr id="6" name="">
             <a:extLst xmlns:a="http://schemas.openxmlformats.org/drawingml/2006/main">
               <a:ext uri="{FF2B5EF4-FFF2-40B4-BE49-F238E27FC236}">
-                <a16:creationId xmlns:a16="http://schemas.microsoft.com/office/drawing/2014/main" id="{FF7E8BDC-3AA0-4880-9336-169E773043D5}"/>
+                <a16:creationId xmlns:a16="http://schemas.microsoft.com/office/drawing/2014/main" id="{9C81FE04-7D55-485E-90E4-E3C50DE729EE}"/>
               </a:ext>
             </a:extLst>
           </p:cNvPr>
@@ -11256,7 +11456,7 @@
           <p:cNvPr id="7" name="">
             <a:extLst xmlns:a="http://schemas.openxmlformats.org/drawingml/2006/main">
               <a:ext uri="{FF2B5EF4-FFF2-40B4-BE49-F238E27FC236}">
-                <a16:creationId xmlns:a16="http://schemas.microsoft.com/office/drawing/2014/main" id="{22A87895-41C0-48C7-8088-E71CCEF09087}"/>
+                <a16:creationId xmlns:a16="http://schemas.microsoft.com/office/drawing/2014/main" id="{AB8BE9A4-F10D-4401-B610-1534BAB86E6B}"/>
               </a:ext>
             </a:extLst>
           </p:cNvPr>
@@ -11288,7 +11488,7 @@
           <p:cNvPr id="8" name="">
             <a:extLst xmlns:a="http://schemas.openxmlformats.org/drawingml/2006/main">
               <a:ext uri="{FF2B5EF4-FFF2-40B4-BE49-F238E27FC236}">
-                <a16:creationId xmlns:a16="http://schemas.microsoft.com/office/drawing/2014/main" id="{81B7927E-F1BA-4FA7-B73D-14BE4095F7DE}"/>
+                <a16:creationId xmlns:a16="http://schemas.microsoft.com/office/drawing/2014/main" id="{E7CF4A46-C102-4498-B049-D2E25D3ACEE9}"/>
               </a:ext>
             </a:extLst>
           </p:cNvPr>
@@ -11345,7 +11545,7 @@
           <p:cNvPr id="9" name="">
             <a:extLst xmlns:a="http://schemas.openxmlformats.org/drawingml/2006/main">
               <a:ext uri="{FF2B5EF4-FFF2-40B4-BE49-F238E27FC236}">
-                <a16:creationId xmlns:a16="http://schemas.microsoft.com/office/drawing/2014/main" id="{16C47D6B-3443-4470-810E-30FEC6C2D81E}"/>
+                <a16:creationId xmlns:a16="http://schemas.microsoft.com/office/drawing/2014/main" id="{0B089DB5-57C3-419F-8426-F61EBBD67CFF}"/>
               </a:ext>
             </a:extLst>
           </p:cNvPr>
@@ -11406,7 +11606,7 @@
           <p:nvPr/>
         </p:nvPicPr>
         <p:blipFill>
-          <a:blip xmlns:r="http://schemas.openxmlformats.org/officeDocument/2006/relationships" xmlns:a="http://schemas.openxmlformats.org/drawingml/2006/main" r:embed="Rd06da3df22e043a9"/>
+          <a:blip xmlns:r="http://schemas.openxmlformats.org/officeDocument/2006/relationships" xmlns:a="http://schemas.openxmlformats.org/drawingml/2006/main" r:embed="R0f34d3e0af904e2b"/>
           <a:stretch xmlns:a="http://schemas.openxmlformats.org/drawingml/2006/main"/>
         </p:blipFill>
         <p:spPr>
@@ -11424,7 +11624,7 @@
           <p:cNvPr id="11" name="">
             <a:extLst xmlns:a="http://schemas.openxmlformats.org/drawingml/2006/main">
               <a:ext uri="{FF2B5EF4-FFF2-40B4-BE49-F238E27FC236}">
-                <a16:creationId xmlns:a16="http://schemas.microsoft.com/office/drawing/2014/main" id="{FCCE42C9-E952-42BA-B486-D36346A9E2BA}"/>
+                <a16:creationId xmlns:a16="http://schemas.microsoft.com/office/drawing/2014/main" id="{93DD014F-36D7-4AF3-9BE9-00E708C4702F}"/>
               </a:ext>
             </a:extLst>
           </p:cNvPr>
@@ -11481,7 +11681,7 @@
           <p:cNvPr id="12" name="">
             <a:extLst xmlns:a="http://schemas.openxmlformats.org/drawingml/2006/main">
               <a:ext uri="{FF2B5EF4-FFF2-40B4-BE49-F238E27FC236}">
-                <a16:creationId xmlns:a16="http://schemas.microsoft.com/office/drawing/2014/main" id="{3924DC00-D0A6-4D46-ABCE-7C48497538A0}"/>
+                <a16:creationId xmlns:a16="http://schemas.microsoft.com/office/drawing/2014/main" id="{3CBB094F-191C-48E6-8B32-17FCCAB4C89E}"/>
               </a:ext>
             </a:extLst>
           </p:cNvPr>
@@ -11538,7 +11738,7 @@
           <p:cNvPr id="13" name="">
             <a:extLst xmlns:a="http://schemas.openxmlformats.org/drawingml/2006/main">
               <a:ext uri="{FF2B5EF4-FFF2-40B4-BE49-F238E27FC236}">
-                <a16:creationId xmlns:a16="http://schemas.microsoft.com/office/drawing/2014/main" id="{8329B7F5-C2FE-469C-919A-6494BD6CBE4E}"/>
+                <a16:creationId xmlns:a16="http://schemas.microsoft.com/office/drawing/2014/main" id="{0C291F2F-FEAE-41A2-BB68-C602866F94EC}"/>
               </a:ext>
             </a:extLst>
           </p:cNvPr>
@@ -11570,7 +11770,7 @@
           <p:cNvPr id="14" name="">
             <a:extLst xmlns:a="http://schemas.openxmlformats.org/drawingml/2006/main">
               <a:ext uri="{FF2B5EF4-FFF2-40B4-BE49-F238E27FC236}">
-                <a16:creationId xmlns:a16="http://schemas.microsoft.com/office/drawing/2014/main" id="{DEF86DCE-9E85-4CBA-BDFE-F9B78A366476}"/>
+                <a16:creationId xmlns:a16="http://schemas.microsoft.com/office/drawing/2014/main" id="{B9400B59-6129-4FB9-A690-863A4EBEE88E}"/>
               </a:ext>
             </a:extLst>
           </p:cNvPr>
@@ -11627,7 +11827,7 @@
           <p:cNvPr id="15" name="">
             <a:extLst xmlns:a="http://schemas.openxmlformats.org/drawingml/2006/main">
               <a:ext uri="{FF2B5EF4-FFF2-40B4-BE49-F238E27FC236}">
-                <a16:creationId xmlns:a16="http://schemas.microsoft.com/office/drawing/2014/main" id="{C10E5872-9993-4B6D-9649-1699CAAE8527}"/>
+                <a16:creationId xmlns:a16="http://schemas.microsoft.com/office/drawing/2014/main" id="{AECC1357-CD0E-4590-A276-1416D2162A1E}"/>
               </a:ext>
             </a:extLst>
           </p:cNvPr>
@@ -11682,7 +11882,7 @@
     </p:spTree>
     <p:extLst>
       <p:ext uri="{BB962C8B-B14F-4D97-AF65-F5344CB8AC3E}">
-        <p14:creationId xmlns:p14="http://schemas.microsoft.com/office/powerpoint/2010/main" val="1089712603"/>
+        <p14:creationId xmlns:p14="http://schemas.microsoft.com/office/powerpoint/2010/main" val="1400572345"/>
       </p:ext>
     </p:extLst>
   </p:cSld>
@@ -11837,7 +12037,7 @@
           <p:cNvPr id="23" name="">
             <a:extLst xmlns:a="http://schemas.openxmlformats.org/drawingml/2006/main">
               <a:ext uri="{FF2B5EF4-FFF2-40B4-BE49-F238E27FC236}">
-                <a16:creationId xmlns:a16="http://schemas.microsoft.com/office/drawing/2014/main" id="{9ADBC4AD-7AFC-413C-BAB5-9424E7221F2F}"/>
+                <a16:creationId xmlns:a16="http://schemas.microsoft.com/office/drawing/2014/main" id="{FF32DFB0-1EB4-4655-A11B-FC6C4BFE05B2}"/>
               </a:ext>
             </a:extLst>
           </p:cNvPr>
@@ -11869,7 +12069,7 @@
           <p:cNvPr id="2" name="">
             <a:extLst xmlns:a="http://schemas.openxmlformats.org/drawingml/2006/main">
               <a:ext uri="{FF2B5EF4-FFF2-40B4-BE49-F238E27FC236}">
-                <a16:creationId xmlns:a16="http://schemas.microsoft.com/office/drawing/2014/main" id="{C4F97689-DCBE-46EF-AA48-E62963ABABBA}"/>
+                <a16:creationId xmlns:a16="http://schemas.microsoft.com/office/drawing/2014/main" id="{64BCE59B-30A3-4A9D-B8B6-3A1BD5022FDB}"/>
               </a:ext>
             </a:extLst>
           </p:cNvPr>
@@ -11926,7 +12126,7 @@
           <p:cNvPr id="3" name="">
             <a:extLst xmlns:a="http://schemas.openxmlformats.org/drawingml/2006/main">
               <a:ext uri="{FF2B5EF4-FFF2-40B4-BE49-F238E27FC236}">
-                <a16:creationId xmlns:a16="http://schemas.microsoft.com/office/drawing/2014/main" id="{D500648F-64D4-4710-858E-C85CA62BFFD8}"/>
+                <a16:creationId xmlns:a16="http://schemas.microsoft.com/office/drawing/2014/main" id="{CB7228DA-B790-41B7-B358-F0571ECFCB75}"/>
               </a:ext>
             </a:extLst>
           </p:cNvPr>
@@ -11958,7 +12158,7 @@
           <p:cNvPr id="4" name="">
             <a:extLst xmlns:a="http://schemas.openxmlformats.org/drawingml/2006/main">
               <a:ext uri="{FF2B5EF4-FFF2-40B4-BE49-F238E27FC236}">
-                <a16:creationId xmlns:a16="http://schemas.microsoft.com/office/drawing/2014/main" id="{7A75B37D-FAB4-459E-B74D-4CAB91084072}"/>
+                <a16:creationId xmlns:a16="http://schemas.microsoft.com/office/drawing/2014/main" id="{25C41E93-ED21-4FC9-89B0-A3DF2ECE6714}"/>
               </a:ext>
             </a:extLst>
           </p:cNvPr>
@@ -12015,7 +12215,7 @@
           <p:cNvPr id="5" name="">
             <a:extLst xmlns:a="http://schemas.openxmlformats.org/drawingml/2006/main">
               <a:ext uri="{FF2B5EF4-FFF2-40B4-BE49-F238E27FC236}">
-                <a16:creationId xmlns:a16="http://schemas.microsoft.com/office/drawing/2014/main" id="{7E46E5D5-9580-4DB4-BFD6-EBFADA9F2B79}"/>
+                <a16:creationId xmlns:a16="http://schemas.microsoft.com/office/drawing/2014/main" id="{80FD638F-81C0-424C-A178-6AA1A380EF92}"/>
               </a:ext>
             </a:extLst>
           </p:cNvPr>
@@ -12072,7 +12272,7 @@
           <p:cNvPr id="6" name="">
             <a:extLst xmlns:a="http://schemas.openxmlformats.org/drawingml/2006/main">
               <a:ext uri="{FF2B5EF4-FFF2-40B4-BE49-F238E27FC236}">
-                <a16:creationId xmlns:a16="http://schemas.microsoft.com/office/drawing/2014/main" id="{9F958DB5-D3F0-48B2-9070-B87384CDD27E}"/>
+                <a16:creationId xmlns:a16="http://schemas.microsoft.com/office/drawing/2014/main" id="{4F57BD47-2954-4A6A-A8E5-42B88D593213}"/>
               </a:ext>
             </a:extLst>
           </p:cNvPr>
@@ -12129,7 +12329,7 @@
           <p:cNvPr id="7" name="">
             <a:extLst xmlns:a="http://schemas.openxmlformats.org/drawingml/2006/main">
               <a:ext uri="{FF2B5EF4-FFF2-40B4-BE49-F238E27FC236}">
-                <a16:creationId xmlns:a16="http://schemas.microsoft.com/office/drawing/2014/main" id="{C3A4CC28-33A1-4158-BC16-14D4D1C2A943}"/>
+                <a16:creationId xmlns:a16="http://schemas.microsoft.com/office/drawing/2014/main" id="{EC12EFDC-F049-4576-B1E7-AF21EB488548}"/>
               </a:ext>
             </a:extLst>
           </p:cNvPr>
@@ -12161,7 +12361,7 @@
           <p:cNvPr id="8" name="">
             <a:extLst xmlns:a="http://schemas.openxmlformats.org/drawingml/2006/main">
               <a:ext uri="{FF2B5EF4-FFF2-40B4-BE49-F238E27FC236}">
-                <a16:creationId xmlns:a16="http://schemas.microsoft.com/office/drawing/2014/main" id="{2F9C982A-148E-46CC-8014-4686AA50FE41}"/>
+                <a16:creationId xmlns:a16="http://schemas.microsoft.com/office/drawing/2014/main" id="{7C741CB0-4694-4926-87D3-47368F248997}"/>
               </a:ext>
             </a:extLst>
           </p:cNvPr>
@@ -12218,7 +12418,7 @@
           <p:cNvPr id="9" name="">
             <a:extLst xmlns:a="http://schemas.openxmlformats.org/drawingml/2006/main">
               <a:ext uri="{FF2B5EF4-FFF2-40B4-BE49-F238E27FC236}">
-                <a16:creationId xmlns:a16="http://schemas.microsoft.com/office/drawing/2014/main" id="{7E3A14F5-8F6C-4749-8509-17535BABF021}"/>
+                <a16:creationId xmlns:a16="http://schemas.microsoft.com/office/drawing/2014/main" id="{A4916F28-9DC0-4532-AA7B-E95A150FADBF}"/>
               </a:ext>
             </a:extLst>
           </p:cNvPr>
@@ -12275,7 +12475,7 @@
           <p:cNvPr id="10" name="">
             <a:extLst xmlns:a="http://schemas.openxmlformats.org/drawingml/2006/main">
               <a:ext uri="{FF2B5EF4-FFF2-40B4-BE49-F238E27FC236}">
-                <a16:creationId xmlns:a16="http://schemas.microsoft.com/office/drawing/2014/main" id="{2360BB0C-6082-4419-ADD2-56CBE7A1C062}"/>
+                <a16:creationId xmlns:a16="http://schemas.microsoft.com/office/drawing/2014/main" id="{2813BD69-CE24-41C8-BEC1-93B7BF129723}"/>
               </a:ext>
             </a:extLst>
           </p:cNvPr>
@@ -12309,7 +12509,7 @@
           <p:cNvPr id="11" name="">
             <a:extLst xmlns:a="http://schemas.openxmlformats.org/drawingml/2006/main">
               <a:ext uri="{FF2B5EF4-FFF2-40B4-BE49-F238E27FC236}">
-                <a16:creationId xmlns:a16="http://schemas.microsoft.com/office/drawing/2014/main" id="{3D631ECB-18F9-4E5D-B61A-6BADE90C9E2C}"/>
+                <a16:creationId xmlns:a16="http://schemas.microsoft.com/office/drawing/2014/main" id="{AE70AF36-DA41-4AD0-8CFB-7A168FF0CEA3}"/>
               </a:ext>
             </a:extLst>
           </p:cNvPr>
@@ -12341,7 +12541,7 @@
           <p:cNvPr id="12" name="">
             <a:extLst xmlns:a="http://schemas.openxmlformats.org/drawingml/2006/main">
               <a:ext uri="{FF2B5EF4-FFF2-40B4-BE49-F238E27FC236}">
-                <a16:creationId xmlns:a16="http://schemas.microsoft.com/office/drawing/2014/main" id="{F12156EB-7D8E-429B-8CD7-56D6EED8E7AB}"/>
+                <a16:creationId xmlns:a16="http://schemas.microsoft.com/office/drawing/2014/main" id="{607DFE9C-E81C-430C-A074-FD4EB6BDABEB}"/>
               </a:ext>
             </a:extLst>
           </p:cNvPr>
@@ -12398,7 +12598,7 @@
           <p:cNvPr id="13" name="">
             <a:extLst xmlns:a="http://schemas.openxmlformats.org/drawingml/2006/main">
               <a:ext uri="{FF2B5EF4-FFF2-40B4-BE49-F238E27FC236}">
-                <a16:creationId xmlns:a16="http://schemas.microsoft.com/office/drawing/2014/main" id="{3783D45C-A7FC-4745-87CD-B78A810968CE}"/>
+                <a16:creationId xmlns:a16="http://schemas.microsoft.com/office/drawing/2014/main" id="{201E3740-4688-40FC-A5B3-E38B50DF2E73}"/>
               </a:ext>
             </a:extLst>
           </p:cNvPr>
@@ -12455,7 +12655,7 @@
           <p:cNvPr id="14" name="">
             <a:extLst xmlns:a="http://schemas.openxmlformats.org/drawingml/2006/main">
               <a:ext uri="{FF2B5EF4-FFF2-40B4-BE49-F238E27FC236}">
-                <a16:creationId xmlns:a16="http://schemas.microsoft.com/office/drawing/2014/main" id="{51A10767-8066-4535-8A9A-CADF22BE89BF}"/>
+                <a16:creationId xmlns:a16="http://schemas.microsoft.com/office/drawing/2014/main" id="{AE259C2A-D9F4-4A5C-AA69-4457DFDB89B1}"/>
               </a:ext>
             </a:extLst>
           </p:cNvPr>
@@ -12489,7 +12689,7 @@
           <p:cNvPr id="15" name="">
             <a:extLst xmlns:a="http://schemas.openxmlformats.org/drawingml/2006/main">
               <a:ext uri="{FF2B5EF4-FFF2-40B4-BE49-F238E27FC236}">
-                <a16:creationId xmlns:a16="http://schemas.microsoft.com/office/drawing/2014/main" id="{C078BDED-47F6-42AC-AEA8-FB04EC8288BD}"/>
+                <a16:creationId xmlns:a16="http://schemas.microsoft.com/office/drawing/2014/main" id="{B40D94C6-B9AC-4F9F-A109-20C7FE308C4C}"/>
               </a:ext>
             </a:extLst>
           </p:cNvPr>
@@ -12521,7 +12721,7 @@
           <p:cNvPr id="16" name="">
             <a:extLst xmlns:a="http://schemas.openxmlformats.org/drawingml/2006/main">
               <a:ext uri="{FF2B5EF4-FFF2-40B4-BE49-F238E27FC236}">
-                <a16:creationId xmlns:a16="http://schemas.microsoft.com/office/drawing/2014/main" id="{81991122-64F2-48B9-A2FA-328AA08DF524}"/>
+                <a16:creationId xmlns:a16="http://schemas.microsoft.com/office/drawing/2014/main" id="{8D249594-FEB2-48D6-B392-8E34D2C0CBBF}"/>
               </a:ext>
             </a:extLst>
           </p:cNvPr>
@@ -12578,7 +12778,7 @@
           <p:cNvPr id="17" name="">
             <a:extLst xmlns:a="http://schemas.openxmlformats.org/drawingml/2006/main">
               <a:ext uri="{FF2B5EF4-FFF2-40B4-BE49-F238E27FC236}">
-                <a16:creationId xmlns:a16="http://schemas.microsoft.com/office/drawing/2014/main" id="{573D2BB8-9092-423E-8511-7A15EAFF3B6F}"/>
+                <a16:creationId xmlns:a16="http://schemas.microsoft.com/office/drawing/2014/main" id="{04A6AD17-BACD-40CD-BCC6-C3AE3BC271FC}"/>
               </a:ext>
             </a:extLst>
           </p:cNvPr>
@@ -12635,7 +12835,7 @@
           <p:cNvPr id="18" name="">
             <a:extLst xmlns:a="http://schemas.openxmlformats.org/drawingml/2006/main">
               <a:ext uri="{FF2B5EF4-FFF2-40B4-BE49-F238E27FC236}">
-                <a16:creationId xmlns:a16="http://schemas.microsoft.com/office/drawing/2014/main" id="{35FDF4C0-45AA-45AA-8D16-EAC481588DBC}"/>
+                <a16:creationId xmlns:a16="http://schemas.microsoft.com/office/drawing/2014/main" id="{F2B529CA-F833-422B-AFAB-A1878639CF46}"/>
               </a:ext>
             </a:extLst>
           </p:cNvPr>
@@ -12669,7 +12869,7 @@
           <p:cNvPr id="19" name="">
             <a:extLst xmlns:a="http://schemas.openxmlformats.org/drawingml/2006/main">
               <a:ext uri="{FF2B5EF4-FFF2-40B4-BE49-F238E27FC236}">
-                <a16:creationId xmlns:a16="http://schemas.microsoft.com/office/drawing/2014/main" id="{0F7D358F-4AF5-4F08-8420-6606EE8BB7BE}"/>
+                <a16:creationId xmlns:a16="http://schemas.microsoft.com/office/drawing/2014/main" id="{E99D2BAF-2AC1-4A9E-A926-BEF8F0FFBA59}"/>
               </a:ext>
             </a:extLst>
           </p:cNvPr>
@@ -12701,7 +12901,7 @@
           <p:cNvPr id="20" name="">
             <a:extLst xmlns:a="http://schemas.openxmlformats.org/drawingml/2006/main">
               <a:ext uri="{FF2B5EF4-FFF2-40B4-BE49-F238E27FC236}">
-                <a16:creationId xmlns:a16="http://schemas.microsoft.com/office/drawing/2014/main" id="{EC08B97B-70DD-4322-A8AA-DDE334627FAA}"/>
+                <a16:creationId xmlns:a16="http://schemas.microsoft.com/office/drawing/2014/main" id="{8D3622F1-6F7A-41A1-BC73-A292882F60F6}"/>
               </a:ext>
             </a:extLst>
           </p:cNvPr>
@@ -12758,7 +12958,7 @@
           <p:cNvPr id="21" name="">
             <a:extLst xmlns:a="http://schemas.openxmlformats.org/drawingml/2006/main">
               <a:ext uri="{FF2B5EF4-FFF2-40B4-BE49-F238E27FC236}">
-                <a16:creationId xmlns:a16="http://schemas.microsoft.com/office/drawing/2014/main" id="{B562D565-8060-4642-9AD1-22885585D631}"/>
+                <a16:creationId xmlns:a16="http://schemas.microsoft.com/office/drawing/2014/main" id="{1F5C6742-C8B2-4B90-B2E2-8CA2EABF1FA4}"/>
               </a:ext>
             </a:extLst>
           </p:cNvPr>
@@ -12815,7 +13015,7 @@
           <p:cNvPr id="22" name="">
             <a:extLst xmlns:a="http://schemas.openxmlformats.org/drawingml/2006/main">
               <a:ext uri="{FF2B5EF4-FFF2-40B4-BE49-F238E27FC236}">
-                <a16:creationId xmlns:a16="http://schemas.microsoft.com/office/drawing/2014/main" id="{26BEBC3C-E662-44B5-918A-C79E8828B05C}"/>
+                <a16:creationId xmlns:a16="http://schemas.microsoft.com/office/drawing/2014/main" id="{4DD280D3-0FD9-4CF2-9C05-CB1DFDD515F0}"/>
               </a:ext>
             </a:extLst>
           </p:cNvPr>
@@ -12870,7 +13070,7 @@
     </p:spTree>
     <p:extLst>
       <p:ext uri="{BB962C8B-B14F-4D97-AF65-F5344CB8AC3E}">
-        <p14:creationId xmlns:p14="http://schemas.microsoft.com/office/powerpoint/2010/main" val="2069651610"/>
+        <p14:creationId xmlns:p14="http://schemas.microsoft.com/office/powerpoint/2010/main" val="1841622708"/>
       </p:ext>
     </p:extLst>
   </p:cSld>
@@ -13071,7 +13271,7 @@
           <p:cNvPr id="22" name="">
             <a:extLst xmlns:a="http://schemas.openxmlformats.org/drawingml/2006/main">
               <a:ext uri="{FF2B5EF4-FFF2-40B4-BE49-F238E27FC236}">
-                <a16:creationId xmlns:a16="http://schemas.microsoft.com/office/drawing/2014/main" id="{18AEFC3D-3ADD-402F-A466-A7F22C4A997D}"/>
+                <a16:creationId xmlns:a16="http://schemas.microsoft.com/office/drawing/2014/main" id="{1CFFEC7A-C91A-4CE8-8C5C-4324CBA2B70F}"/>
               </a:ext>
             </a:extLst>
           </p:cNvPr>
@@ -13103,7 +13303,7 @@
           <p:cNvPr id="2" name="">
             <a:extLst xmlns:a="http://schemas.openxmlformats.org/drawingml/2006/main">
               <a:ext uri="{FF2B5EF4-FFF2-40B4-BE49-F238E27FC236}">
-                <a16:creationId xmlns:a16="http://schemas.microsoft.com/office/drawing/2014/main" id="{9C1B7EE0-1470-43AE-9A60-7250535B34CA}"/>
+                <a16:creationId xmlns:a16="http://schemas.microsoft.com/office/drawing/2014/main" id="{281BA2AE-917B-4F40-AFD4-412583AC6300}"/>
               </a:ext>
             </a:extLst>
           </p:cNvPr>
@@ -13160,7 +13360,7 @@
           <p:cNvPr id="3" name="">
             <a:extLst xmlns:a="http://schemas.openxmlformats.org/drawingml/2006/main">
               <a:ext uri="{FF2B5EF4-FFF2-40B4-BE49-F238E27FC236}">
-                <a16:creationId xmlns:a16="http://schemas.microsoft.com/office/drawing/2014/main" id="{5991790C-2977-4682-A65F-7D2158FD3EEC}"/>
+                <a16:creationId xmlns:a16="http://schemas.microsoft.com/office/drawing/2014/main" id="{1FF494E1-AF97-4E67-9A60-0C2E6757415A}"/>
               </a:ext>
             </a:extLst>
           </p:cNvPr>
@@ -13192,7 +13392,7 @@
           <p:cNvPr id="4" name="">
             <a:extLst xmlns:a="http://schemas.openxmlformats.org/drawingml/2006/main">
               <a:ext uri="{FF2B5EF4-FFF2-40B4-BE49-F238E27FC236}">
-                <a16:creationId xmlns:a16="http://schemas.microsoft.com/office/drawing/2014/main" id="{1D2A2CB7-AC36-4BCF-9FDD-4A5F781D44C1}"/>
+                <a16:creationId xmlns:a16="http://schemas.microsoft.com/office/drawing/2014/main" id="{EDAB7B6D-576E-4E60-9788-A6C38ACA3124}"/>
               </a:ext>
             </a:extLst>
           </p:cNvPr>
@@ -13249,7 +13449,7 @@
           <p:cNvPr id="5" name="">
             <a:extLst xmlns:a="http://schemas.openxmlformats.org/drawingml/2006/main">
               <a:ext uri="{FF2B5EF4-FFF2-40B4-BE49-F238E27FC236}">
-                <a16:creationId xmlns:a16="http://schemas.microsoft.com/office/drawing/2014/main" id="{6DE11763-5719-4721-BDF5-97A6042BF8D0}"/>
+                <a16:creationId xmlns:a16="http://schemas.microsoft.com/office/drawing/2014/main" id="{AE40E05F-32A7-41CE-B6F1-E85F1E90BB93}"/>
               </a:ext>
             </a:extLst>
           </p:cNvPr>
@@ -13306,7 +13506,7 @@
           <p:cNvPr id="6" name="">
             <a:extLst xmlns:a="http://schemas.openxmlformats.org/drawingml/2006/main">
               <a:ext uri="{FF2B5EF4-FFF2-40B4-BE49-F238E27FC236}">
-                <a16:creationId xmlns:a16="http://schemas.microsoft.com/office/drawing/2014/main" id="{DCAD8C11-5C32-4E6D-BE3F-68F471669D4C}"/>
+                <a16:creationId xmlns:a16="http://schemas.microsoft.com/office/drawing/2014/main" id="{FD08E01E-C20C-4F31-842D-A7F9BF0645F3}"/>
               </a:ext>
             </a:extLst>
           </p:cNvPr>
@@ -13363,7 +13563,7 @@
           <p:cNvPr id="7" name="">
             <a:extLst xmlns:a="http://schemas.openxmlformats.org/drawingml/2006/main">
               <a:ext uri="{FF2B5EF4-FFF2-40B4-BE49-F238E27FC236}">
-                <a16:creationId xmlns:a16="http://schemas.microsoft.com/office/drawing/2014/main" id="{4D44465F-E2CB-4B20-9480-7615C86F62ED}"/>
+                <a16:creationId xmlns:a16="http://schemas.microsoft.com/office/drawing/2014/main" id="{A56FAEB9-54A4-4DC4-AC64-5BBD76800047}"/>
               </a:ext>
             </a:extLst>
           </p:cNvPr>
@@ -13395,7 +13595,7 @@
           <p:cNvPr id="8" name="">
             <a:extLst xmlns:a="http://schemas.openxmlformats.org/drawingml/2006/main">
               <a:ext uri="{FF2B5EF4-FFF2-40B4-BE49-F238E27FC236}">
-                <a16:creationId xmlns:a16="http://schemas.microsoft.com/office/drawing/2014/main" id="{A868C0AE-CEB4-4D3F-BE9F-92F80BA00EC8}"/>
+                <a16:creationId xmlns:a16="http://schemas.microsoft.com/office/drawing/2014/main" id="{84EEBD3E-3DD0-42B4-B7AA-3EB2F273D938}"/>
               </a:ext>
             </a:extLst>
           </p:cNvPr>
@@ -13452,7 +13652,7 @@
           <p:cNvPr id="9" name="">
             <a:extLst xmlns:a="http://schemas.openxmlformats.org/drawingml/2006/main">
               <a:ext uri="{FF2B5EF4-FFF2-40B4-BE49-F238E27FC236}">
-                <a16:creationId xmlns:a16="http://schemas.microsoft.com/office/drawing/2014/main" id="{A5CD49DF-5503-4A1C-B0F6-72BADB86C7A6}"/>
+                <a16:creationId xmlns:a16="http://schemas.microsoft.com/office/drawing/2014/main" id="{9A55A98D-6EA4-4DE7-8683-D2F4427E8FD7}"/>
               </a:ext>
             </a:extLst>
           </p:cNvPr>
@@ -13509,7 +13709,7 @@
           <p:cNvPr id="10" name="">
             <a:extLst xmlns:a="http://schemas.openxmlformats.org/drawingml/2006/main">
               <a:ext uri="{FF2B5EF4-FFF2-40B4-BE49-F238E27FC236}">
-                <a16:creationId xmlns:a16="http://schemas.microsoft.com/office/drawing/2014/main" id="{EC8845F1-B721-4A31-A9B2-BE3BD4C0F017}"/>
+                <a16:creationId xmlns:a16="http://schemas.microsoft.com/office/drawing/2014/main" id="{3203E47F-FD06-4ED5-BA55-952FB4D2D4F3}"/>
               </a:ext>
             </a:extLst>
           </p:cNvPr>
@@ -13543,7 +13743,7 @@
           <p:cNvPr id="11" name="">
             <a:extLst xmlns:a="http://schemas.openxmlformats.org/drawingml/2006/main">
               <a:ext uri="{FF2B5EF4-FFF2-40B4-BE49-F238E27FC236}">
-                <a16:creationId xmlns:a16="http://schemas.microsoft.com/office/drawing/2014/main" id="{E437D7AC-D062-48EA-AD12-62577EFF0585}"/>
+                <a16:creationId xmlns:a16="http://schemas.microsoft.com/office/drawing/2014/main" id="{3A6CA5F4-FD6E-4172-91EB-CCC1895E4FE0}"/>
               </a:ext>
             </a:extLst>
           </p:cNvPr>
@@ -13575,7 +13775,7 @@
           <p:cNvPr id="12" name="">
             <a:extLst xmlns:a="http://schemas.openxmlformats.org/drawingml/2006/main">
               <a:ext uri="{FF2B5EF4-FFF2-40B4-BE49-F238E27FC236}">
-                <a16:creationId xmlns:a16="http://schemas.microsoft.com/office/drawing/2014/main" id="{8A8DA199-5DDF-4197-9A97-82D0932270A7}"/>
+                <a16:creationId xmlns:a16="http://schemas.microsoft.com/office/drawing/2014/main" id="{38568AF3-AAB0-4CB2-BF14-BA8BB93F19F9}"/>
               </a:ext>
             </a:extLst>
           </p:cNvPr>
@@ -13632,7 +13832,7 @@
           <p:cNvPr id="13" name="">
             <a:extLst xmlns:a="http://schemas.openxmlformats.org/drawingml/2006/main">
               <a:ext uri="{FF2B5EF4-FFF2-40B4-BE49-F238E27FC236}">
-                <a16:creationId xmlns:a16="http://schemas.microsoft.com/office/drawing/2014/main" id="{F51C3D26-D601-46E3-B1A0-BF34581F72AD}"/>
+                <a16:creationId xmlns:a16="http://schemas.microsoft.com/office/drawing/2014/main" id="{329A9046-4BD1-4977-A062-EF58591ED418}"/>
               </a:ext>
             </a:extLst>
           </p:cNvPr>
@@ -13689,7 +13889,7 @@
           <p:cNvPr id="14" name="">
             <a:extLst xmlns:a="http://schemas.openxmlformats.org/drawingml/2006/main">
               <a:ext uri="{FF2B5EF4-FFF2-40B4-BE49-F238E27FC236}">
-                <a16:creationId xmlns:a16="http://schemas.microsoft.com/office/drawing/2014/main" id="{D340DDB4-6B31-48F5-B10F-BEA63C89977B}"/>
+                <a16:creationId xmlns:a16="http://schemas.microsoft.com/office/drawing/2014/main" id="{BA12B08B-D744-461F-8144-02AF38D8E71C}"/>
               </a:ext>
             </a:extLst>
           </p:cNvPr>
@@ -13723,7 +13923,7 @@
           <p:cNvPr id="15" name="">
             <a:extLst xmlns:a="http://schemas.openxmlformats.org/drawingml/2006/main">
               <a:ext uri="{FF2B5EF4-FFF2-40B4-BE49-F238E27FC236}">
-                <a16:creationId xmlns:a16="http://schemas.microsoft.com/office/drawing/2014/main" id="{6376F64A-9C68-48F7-988B-EBE7B7E3FE19}"/>
+                <a16:creationId xmlns:a16="http://schemas.microsoft.com/office/drawing/2014/main" id="{0554E653-9EDC-47F8-ADEF-62CC6C2A5774}"/>
               </a:ext>
             </a:extLst>
           </p:cNvPr>
@@ -13755,7 +13955,7 @@
           <p:cNvPr id="16" name="">
             <a:extLst xmlns:a="http://schemas.openxmlformats.org/drawingml/2006/main">
               <a:ext uri="{FF2B5EF4-FFF2-40B4-BE49-F238E27FC236}">
-                <a16:creationId xmlns:a16="http://schemas.microsoft.com/office/drawing/2014/main" id="{F5634536-5BB6-4391-BD38-F62B29A2566B}"/>
+                <a16:creationId xmlns:a16="http://schemas.microsoft.com/office/drawing/2014/main" id="{FAC4C90A-96A7-4721-8D09-0448E950EE68}"/>
               </a:ext>
             </a:extLst>
           </p:cNvPr>
@@ -13812,7 +14012,7 @@
           <p:cNvPr id="17" name="">
             <a:extLst xmlns:a="http://schemas.openxmlformats.org/drawingml/2006/main">
               <a:ext uri="{FF2B5EF4-FFF2-40B4-BE49-F238E27FC236}">
-                <a16:creationId xmlns:a16="http://schemas.microsoft.com/office/drawing/2014/main" id="{083EBF3D-0D67-49C2-A338-D3A1BE1CE8B9}"/>
+                <a16:creationId xmlns:a16="http://schemas.microsoft.com/office/drawing/2014/main" id="{EC347B39-947F-448D-B018-3A6C731ABD26}"/>
               </a:ext>
             </a:extLst>
           </p:cNvPr>
@@ -13869,7 +14069,7 @@
           <p:cNvPr id="18" name="">
             <a:extLst xmlns:a="http://schemas.openxmlformats.org/drawingml/2006/main">
               <a:ext uri="{FF2B5EF4-FFF2-40B4-BE49-F238E27FC236}">
-                <a16:creationId xmlns:a16="http://schemas.microsoft.com/office/drawing/2014/main" id="{44519A55-2602-4F93-AFC9-740DC7476AFB}"/>
+                <a16:creationId xmlns:a16="http://schemas.microsoft.com/office/drawing/2014/main" id="{2232192F-D345-4567-AC97-8F0E5A3C20AA}"/>
               </a:ext>
             </a:extLst>
           </p:cNvPr>
@@ -13903,7 +14103,7 @@
           <p:cNvPr id="19" name="">
             <a:extLst xmlns:a="http://schemas.openxmlformats.org/drawingml/2006/main">
               <a:ext uri="{FF2B5EF4-FFF2-40B4-BE49-F238E27FC236}">
-                <a16:creationId xmlns:a16="http://schemas.microsoft.com/office/drawing/2014/main" id="{48BC66CF-5816-4D41-B6B4-F661D8B2E4BE}"/>
+                <a16:creationId xmlns:a16="http://schemas.microsoft.com/office/drawing/2014/main" id="{62ED3078-B2AE-453F-8D61-D6F1FA413EF9}"/>
               </a:ext>
             </a:extLst>
           </p:cNvPr>
@@ -13935,7 +14135,7 @@
           <p:cNvPr id="20" name="">
             <a:extLst xmlns:a="http://schemas.openxmlformats.org/drawingml/2006/main">
               <a:ext uri="{FF2B5EF4-FFF2-40B4-BE49-F238E27FC236}">
-                <a16:creationId xmlns:a16="http://schemas.microsoft.com/office/drawing/2014/main" id="{E61EECEA-22C2-4179-B1B7-7FF9695C7FC0}"/>
+                <a16:creationId xmlns:a16="http://schemas.microsoft.com/office/drawing/2014/main" id="{878363F7-5D85-4011-8387-C8D5D993E756}"/>
               </a:ext>
             </a:extLst>
           </p:cNvPr>
@@ -13992,7 +14192,7 @@
           <p:cNvPr id="21" name="">
             <a:extLst xmlns:a="http://schemas.openxmlformats.org/drawingml/2006/main">
               <a:ext uri="{FF2B5EF4-FFF2-40B4-BE49-F238E27FC236}">
-                <a16:creationId xmlns:a16="http://schemas.microsoft.com/office/drawing/2014/main" id="{B86BD1BB-F14D-44EF-AE12-87D9A1B4F948}"/>
+                <a16:creationId xmlns:a16="http://schemas.microsoft.com/office/drawing/2014/main" id="{4C1688AB-1788-4E46-8832-C14D15222307}"/>
               </a:ext>
             </a:extLst>
           </p:cNvPr>
@@ -14047,7 +14247,7 @@
     </p:spTree>
     <p:extLst>
       <p:ext uri="{BB962C8B-B14F-4D97-AF65-F5344CB8AC3E}">
-        <p14:creationId xmlns:p14="http://schemas.microsoft.com/office/powerpoint/2010/main" val="905624860"/>
+        <p14:creationId xmlns:p14="http://schemas.microsoft.com/office/powerpoint/2010/main" val="927020051"/>
       </p:ext>
     </p:extLst>
   </p:cSld>
